--- a/SOUTENANCE.pptx
+++ b/SOUTENANCE.pptx
@@ -605,7 +605,7 @@
           <a:p>
             <a:r>
               <a:rPr lang="en-US" dirty="0"/>
-              <a:t>L'IA utilise OpenCV et NumPy, les outils standards de la vision par ordinateur en Python. On recoit une photo, OpenCV analyse la couleur, la saturation, le contraste et la texture, on compare aux signatures de cinq maladies et on retourne la plus probable avec un indice de confiance. 87 pour cent de precision en 1,5 seconde.</a:t>
+              <a:t>L'IA utilise OpenCV et NumPy, les outils standards de la vision par ordinateur en Python. On recoit une photo, OpenCV analyse la couleur, la saturation, le contraste et la texture, on compare aux signatures connues et on retourne la classe la plus probable, parmi quatre maladies et l'etat sain, avec un indice de confiance. Objectif interne de 87 pour cent de precision en 1,5 seconde, tous deux depasses.</a:t>
             </a:r>
             <a:endParaRPr lang="en-US" dirty="0"/>
           </a:p>
@@ -869,7 +869,7 @@
           <a:p>
             <a:r>
               <a:rPr lang="en-US" dirty="0"/>
-              <a:t>Les chiffres face aux objectifs. Huit endpoints contre cinq demandes, plus 60 pour cent. 1,5 seconde contre moins de deux secondes exigees. 87 pour cent de precision contre 85 demandes. Trois technologies sur trois. Le projet depasse chaque critere mesurable.</a:t>
+              <a:t>Le cahier des charges n'impose aucun seuil chiffre : ni nombre d'endpoints, ni temps de reponse, ni precision minimale. Ce que le CDC impose vraiment, c'est fait : trois technologies, deploiement cloud, capteurs IoT. Le reste, ce sont des objectifs de qualite qu'on s'est fixes nous-memes, et qu'on a tous depasses : dix-huit endpoints contre cinq vises, 1,5 seconde contre moins de deux visees, 87 pour cent de precision contre 85 vises.</a:t>
             </a:r>
             <a:endParaRPr lang="en-US" dirty="0"/>
           </a:p>
@@ -2664,7 +2664,7 @@
                 <a:ea typeface="Calibri" pitchFamily="34" charset="-122"/>
                 <a:cs typeface="Calibri" pitchFamily="34" charset="-120"/>
               </a:rPr>
-              <a:t>objectif : 85 %</a:t>
+              <a:t>objectif interne : 85 %</a:t>
             </a:r>
             <a:endParaRPr lang="en-US" sz="1200" dirty="0"/>
           </a:p>
@@ -2808,7 +2808,7 @@
                 <a:ea typeface="Calibri" pitchFamily="34" charset="-122"/>
                 <a:cs typeface="Calibri" pitchFamily="34" charset="-120"/>
               </a:rPr>
-              <a:t>objectif : moins de 2 s</a:t>
+              <a:t>objectif interne : moins de 2 s</a:t>
             </a:r>
             <a:endParaRPr lang="en-US" sz="1200" dirty="0"/>
           </a:p>
@@ -2913,7 +2913,7 @@
                 <a:ea typeface="Calibri" pitchFamily="34" charset="-122"/>
                 <a:cs typeface="Calibri" pitchFamily="34" charset="-120"/>
               </a:rPr>
-              <a:t>maladies détectées</a:t>
+              <a:t>classes reconnues</a:t>
             </a:r>
             <a:endParaRPr lang="en-US" sz="1500" dirty="0"/>
           </a:p>
@@ -2952,7 +2952,7 @@
                 <a:ea typeface="Calibri" pitchFamily="34" charset="-122"/>
                 <a:cs typeface="Calibri" pitchFamily="34" charset="-120"/>
               </a:rPr>
-              <a:t>plus l'état sain</a:t>
+              <a:t>4 maladies + état sain</a:t>
             </a:r>
             <a:endParaRPr lang="en-US" sz="1200" dirty="0"/>
           </a:p>
@@ -3706,7 +3706,7 @@
                 <a:ea typeface="Calibri" pitchFamily="34" charset="-122"/>
                 <a:cs typeface="Calibri" pitchFamily="34" charset="-120"/>
               </a:rPr>
-              <a:t>Maladies couvertes  ·  Mildiou  ·  Oïdium  ·  Rouille  ·  Brûlure des feuilles  ·  Tache noire</a:t>
+              <a:t>Maladies couvertes  ·  Rouille du blé  ·  Mildiou du raisin  ·  Oïdium  ·  Septoriose</a:t>
             </a:r>
             <a:endParaRPr lang="en-US" sz="1350" dirty="0"/>
           </a:p>
@@ -5788,7 +5788,7 @@
                 <a:ea typeface="Cambria" pitchFamily="34" charset="-122"/>
                 <a:cs typeface="Cambria" pitchFamily="34" charset="-120"/>
               </a:rPr>
-              <a:t>Chaque cible du cahier des charges est dépassée</a:t>
+              <a:t>Le CDC respecté, nos objectifs dépassés</a:t>
             </a:r>
             <a:endParaRPr lang="en-US" sz="3400" dirty="0"/>
           </a:p>
@@ -5932,7 +5932,7 @@
                 <a:ea typeface="Calibri" pitchFamily="34" charset="-122"/>
                 <a:cs typeface="Calibri" pitchFamily="34" charset="-120"/>
               </a:rPr>
-              <a:t>cible : 5</a:t>
+              <a:t>objectif interne : 5</a:t>
             </a:r>
             <a:endParaRPr lang="en-US" sz="1150" dirty="0"/>
           </a:p>
@@ -6076,7 +6076,7 @@
                 <a:ea typeface="Calibri" pitchFamily="34" charset="-122"/>
                 <a:cs typeface="Calibri" pitchFamily="34" charset="-120"/>
               </a:rPr>
-              <a:t>cible : moins de 2 s</a:t>
+              <a:t>objectif interne : &lt; 2 s</a:t>
             </a:r>
             <a:endParaRPr lang="en-US" sz="1150" dirty="0"/>
           </a:p>
@@ -6220,7 +6220,7 @@
                 <a:ea typeface="Calibri" pitchFamily="34" charset="-122"/>
                 <a:cs typeface="Calibri" pitchFamily="34" charset="-120"/>
               </a:rPr>
-              <a:t>cible : plus de 85 %</a:t>
+              <a:t>objectif interne : 85 %</a:t>
             </a:r>
             <a:endParaRPr lang="en-US" sz="1150" dirty="0"/>
           </a:p>
@@ -6393,10 +6393,10 @@
             <a:tbl>
               <a:tblPr/>
               <a:tblGrid>
-                <a:gridCol w="4206240"/>
-                <a:gridCol w="2377440"/>
-                <a:gridCol w="2468880"/>
+                <a:gridCol w="3657600"/>
                 <a:gridCol w="2011680"/>
+                <a:gridCol w="2651760"/>
+                <a:gridCol w="2743200"/>
               </a:tblGrid>
               <a:tr h="329184">
                 <a:tc>
@@ -6408,7 +6408,7 @@
                         <a:buNone/>
                       </a:pPr>
                       <a:r>
-                        <a:rPr lang="en-US" sz="1300" b="1" dirty="0">
+                        <a:rPr lang="en-US" sz="1250" b="1" dirty="0">
                           <a:solidFill>
                             <a:srgbClr val="FFFFFF"/>
                           </a:solidFill>
@@ -6418,7 +6418,7 @@
                         </a:rPr>
                         <a:t>Critère</a:t>
                       </a:r>
-                      <a:endParaRPr lang="en-US" sz="1300" dirty="0">
+                      <a:endParaRPr lang="en-US" sz="1250" dirty="0">
                         <a:latin typeface="Calibri" charset="0"/>
                         <a:ea typeface="Calibri" charset="0"/>
                         <a:cs typeface="Calibri" charset="0"/>
@@ -6476,7 +6476,7 @@
                         <a:buNone/>
                       </a:pPr>
                       <a:r>
-                        <a:rPr lang="en-US" sz="1300" b="1" dirty="0">
+                        <a:rPr lang="en-US" sz="1250" b="1" dirty="0">
                           <a:solidFill>
                             <a:srgbClr val="FFFFFF"/>
                           </a:solidFill>
@@ -6484,9 +6484,9 @@
                           <a:ea typeface="Calibri" pitchFamily="34" charset="-122"/>
                           <a:cs typeface="Calibri" pitchFamily="34" charset="-120"/>
                         </a:rPr>
-                        <a:t>Cible</a:t>
+                        <a:t>Origine</a:t>
                       </a:r>
-                      <a:endParaRPr lang="en-US" sz="1300" dirty="0">
+                      <a:endParaRPr lang="en-US" sz="1250" dirty="0">
                         <a:latin typeface="Calibri" charset="0"/>
                         <a:ea typeface="Calibri" charset="0"/>
                         <a:cs typeface="Calibri" charset="0"/>
@@ -6544,7 +6544,7 @@
                         <a:buNone/>
                       </a:pPr>
                       <a:r>
-                        <a:rPr lang="en-US" sz="1300" b="1" dirty="0">
+                        <a:rPr lang="en-US" sz="1250" b="1" dirty="0">
                           <a:solidFill>
                             <a:srgbClr val="FFFFFF"/>
                           </a:solidFill>
@@ -6552,9 +6552,9 @@
                           <a:ea typeface="Calibri" pitchFamily="34" charset="-122"/>
                           <a:cs typeface="Calibri" pitchFamily="34" charset="-120"/>
                         </a:rPr>
-                        <a:t>Réalisé</a:t>
+                        <a:t>Cible</a:t>
                       </a:r>
-                      <a:endParaRPr lang="en-US" sz="1300" dirty="0">
+                      <a:endParaRPr lang="en-US" sz="1250" dirty="0">
                         <a:latin typeface="Calibri" charset="0"/>
                         <a:ea typeface="Calibri" charset="0"/>
                         <a:cs typeface="Calibri" charset="0"/>
@@ -6612,7 +6612,7 @@
                         <a:buNone/>
                       </a:pPr>
                       <a:r>
-                        <a:rPr lang="en-US" sz="1300" b="1" dirty="0">
+                        <a:rPr lang="en-US" sz="1250" b="1" dirty="0">
                           <a:solidFill>
                             <a:srgbClr val="FFFFFF"/>
                           </a:solidFill>
@@ -6620,9 +6620,9 @@
                           <a:ea typeface="Calibri" pitchFamily="34" charset="-122"/>
                           <a:cs typeface="Calibri" pitchFamily="34" charset="-120"/>
                         </a:rPr>
-                        <a:t>Écart</a:t>
+                        <a:t>Réalisé</a:t>
                       </a:r>
-                      <a:endParaRPr lang="en-US" sz="1300" dirty="0">
+                      <a:endParaRPr lang="en-US" sz="1250" dirty="0">
                         <a:latin typeface="Calibri" charset="0"/>
                         <a:ea typeface="Calibri" charset="0"/>
                         <a:cs typeface="Calibri" charset="0"/>
@@ -6682,7 +6682,7 @@
                         <a:buNone/>
                       </a:pPr>
                       <a:r>
-                        <a:rPr lang="en-US" sz="1300" dirty="0">
+                        <a:rPr lang="en-US" sz="1250" dirty="0">
                           <a:solidFill>
                             <a:srgbClr val="2B2B2B"/>
                           </a:solidFill>
@@ -6690,9 +6690,9 @@
                           <a:ea typeface="Calibri" pitchFamily="34" charset="-122"/>
                           <a:cs typeface="Calibri" pitchFamily="34" charset="-120"/>
                         </a:rPr>
-                        <a:t>Endpoints de l'API</a:t>
+                        <a:t>Technologies imposées</a:t>
                       </a:r>
-                      <a:endParaRPr lang="en-US" sz="1300" dirty="0">
+                      <a:endParaRPr lang="en-US" sz="1250" dirty="0">
                         <a:latin typeface="Calibri" charset="0"/>
                         <a:ea typeface="Calibri" charset="0"/>
                         <a:cs typeface="Calibri" charset="0"/>
@@ -6750,7 +6750,7 @@
                         <a:buNone/>
                       </a:pPr>
                       <a:r>
-                        <a:rPr lang="en-US" sz="1300" dirty="0">
+                        <a:rPr lang="en-US" sz="1250" dirty="0">
                           <a:solidFill>
                             <a:srgbClr val="2B2B2B"/>
                           </a:solidFill>
@@ -6758,9 +6758,9 @@
                           <a:ea typeface="Calibri" pitchFamily="34" charset="-122"/>
                           <a:cs typeface="Calibri" pitchFamily="34" charset="-120"/>
                         </a:rPr>
-                        <a:t>5 minimum</a:t>
+                        <a:t>CDC</a:t>
                       </a:r>
-                      <a:endParaRPr lang="en-US" sz="1300" dirty="0">
+                      <a:endParaRPr lang="en-US" sz="1250" dirty="0">
                         <a:latin typeface="Calibri" charset="0"/>
                         <a:ea typeface="Calibri" charset="0"/>
                         <a:cs typeface="Calibri" charset="0"/>
@@ -6818,7 +6818,7 @@
                         <a:buNone/>
                       </a:pPr>
                       <a:r>
-                        <a:rPr lang="en-US" sz="1300" dirty="0">
+                        <a:rPr lang="en-US" sz="1250" dirty="0">
                           <a:solidFill>
                             <a:srgbClr val="2B2B2B"/>
                           </a:solidFill>
@@ -6826,9 +6826,9 @@
                           <a:ea typeface="Calibri" pitchFamily="34" charset="-122"/>
                           <a:cs typeface="Calibri" pitchFamily="34" charset="-120"/>
                         </a:rPr>
-                        <a:t>18</a:t>
+                        <a:t>3</a:t>
                       </a:r>
-                      <a:endParaRPr lang="en-US" sz="1300" dirty="0">
+                      <a:endParaRPr lang="en-US" sz="1250" dirty="0">
                         <a:latin typeface="Calibri" charset="0"/>
                         <a:ea typeface="Calibri" charset="0"/>
                         <a:cs typeface="Calibri" charset="0"/>
@@ -6886,7 +6886,7 @@
                         <a:buNone/>
                       </a:pPr>
                       <a:r>
-                        <a:rPr lang="en-US" sz="1300" dirty="0">
+                        <a:rPr lang="en-US" sz="1250" dirty="0">
                           <a:solidFill>
                             <a:srgbClr val="2B2B2B"/>
                           </a:solidFill>
@@ -6894,9 +6894,9 @@
                           <a:ea typeface="Calibri" pitchFamily="34" charset="-122"/>
                           <a:cs typeface="Calibri" pitchFamily="34" charset="-120"/>
                         </a:rPr>
-                        <a:t>+ 260 %</a:t>
+                        <a:t>3</a:t>
                       </a:r>
-                      <a:endParaRPr lang="en-US" sz="1300" dirty="0">
+                      <a:endParaRPr lang="en-US" sz="1250" dirty="0">
                         <a:latin typeface="Calibri" charset="0"/>
                         <a:ea typeface="Calibri" charset="0"/>
                         <a:cs typeface="Calibri" charset="0"/>
@@ -6956,7 +6956,7 @@
                         <a:buNone/>
                       </a:pPr>
                       <a:r>
-                        <a:rPr lang="en-US" sz="1300" dirty="0">
+                        <a:rPr lang="en-US" sz="1250" dirty="0">
                           <a:solidFill>
                             <a:srgbClr val="2B2B2B"/>
                           </a:solidFill>
@@ -6964,9 +6964,9 @@
                           <a:ea typeface="Calibri" pitchFamily="34" charset="-122"/>
                           <a:cs typeface="Calibri" pitchFamily="34" charset="-120"/>
                         </a:rPr>
-                        <a:t>Temps de réponse</a:t>
+                        <a:t>Déploiement cloud</a:t>
                       </a:r>
-                      <a:endParaRPr lang="en-US" sz="1300" dirty="0">
+                      <a:endParaRPr lang="en-US" sz="1250" dirty="0">
                         <a:latin typeface="Calibri" charset="0"/>
                         <a:ea typeface="Calibri" charset="0"/>
                         <a:cs typeface="Calibri" charset="0"/>
@@ -7024,7 +7024,7 @@
                         <a:buNone/>
                       </a:pPr>
                       <a:r>
-                        <a:rPr lang="en-US" sz="1300" dirty="0">
+                        <a:rPr lang="en-US" sz="1250" dirty="0">
                           <a:solidFill>
                             <a:srgbClr val="2B2B2B"/>
                           </a:solidFill>
@@ -7032,9 +7032,9 @@
                           <a:ea typeface="Calibri" pitchFamily="34" charset="-122"/>
                           <a:cs typeface="Calibri" pitchFamily="34" charset="-120"/>
                         </a:rPr>
-                        <a:t>moins de 2 s</a:t>
+                        <a:t>CDC</a:t>
                       </a:r>
-                      <a:endParaRPr lang="en-US" sz="1300" dirty="0">
+                      <a:endParaRPr lang="en-US" sz="1250" dirty="0">
                         <a:latin typeface="Calibri" charset="0"/>
                         <a:ea typeface="Calibri" charset="0"/>
                         <a:cs typeface="Calibri" charset="0"/>
@@ -7092,7 +7092,7 @@
                         <a:buNone/>
                       </a:pPr>
                       <a:r>
-                        <a:rPr lang="en-US" sz="1300" dirty="0">
+                        <a:rPr lang="en-US" sz="1250" dirty="0">
                           <a:solidFill>
                             <a:srgbClr val="2B2B2B"/>
                           </a:solidFill>
@@ -7100,9 +7100,9 @@
                           <a:ea typeface="Calibri" pitchFamily="34" charset="-122"/>
                           <a:cs typeface="Calibri" pitchFamily="34" charset="-120"/>
                         </a:rPr>
-                        <a:t>1,5 s</a:t>
+                        <a:t>requis</a:t>
                       </a:r>
-                      <a:endParaRPr lang="en-US" sz="1300" dirty="0">
+                      <a:endParaRPr lang="en-US" sz="1250" dirty="0">
                         <a:latin typeface="Calibri" charset="0"/>
                         <a:ea typeface="Calibri" charset="0"/>
                         <a:cs typeface="Calibri" charset="0"/>
@@ -7160,7 +7160,7 @@
                         <a:buNone/>
                       </a:pPr>
                       <a:r>
-                        <a:rPr lang="en-US" sz="1300" dirty="0">
+                        <a:rPr lang="en-US" sz="1250" dirty="0">
                           <a:solidFill>
                             <a:srgbClr val="2B2B2B"/>
                           </a:solidFill>
@@ -7168,9 +7168,9 @@
                           <a:ea typeface="Calibri" pitchFamily="34" charset="-122"/>
                           <a:cs typeface="Calibri" pitchFamily="34" charset="-120"/>
                         </a:rPr>
-                        <a:t>- 25 %</a:t>
+                        <a:t>AWS EC2 en ligne</a:t>
                       </a:r>
-                      <a:endParaRPr lang="en-US" sz="1300" dirty="0">
+                      <a:endParaRPr lang="en-US" sz="1250" dirty="0">
                         <a:latin typeface="Calibri" charset="0"/>
                         <a:ea typeface="Calibri" charset="0"/>
                         <a:cs typeface="Calibri" charset="0"/>
@@ -7230,7 +7230,7 @@
                         <a:buNone/>
                       </a:pPr>
                       <a:r>
-                        <a:rPr lang="en-US" sz="1300" dirty="0">
+                        <a:rPr lang="en-US" sz="1250" dirty="0">
                           <a:solidFill>
                             <a:srgbClr val="2B2B2B"/>
                           </a:solidFill>
@@ -7238,9 +7238,9 @@
                           <a:ea typeface="Calibri" pitchFamily="34" charset="-122"/>
                           <a:cs typeface="Calibri" pitchFamily="34" charset="-120"/>
                         </a:rPr>
-                        <a:t>Précision de l'IA</a:t>
+                        <a:t>Capteurs IoT</a:t>
                       </a:r>
-                      <a:endParaRPr lang="en-US" sz="1300" dirty="0">
+                      <a:endParaRPr lang="en-US" sz="1250" dirty="0">
                         <a:latin typeface="Calibri" charset="0"/>
                         <a:ea typeface="Calibri" charset="0"/>
                         <a:cs typeface="Calibri" charset="0"/>
@@ -7298,7 +7298,7 @@
                         <a:buNone/>
                       </a:pPr>
                       <a:r>
-                        <a:rPr lang="en-US" sz="1300" dirty="0">
+                        <a:rPr lang="en-US" sz="1250" dirty="0">
                           <a:solidFill>
                             <a:srgbClr val="2B2B2B"/>
                           </a:solidFill>
@@ -7306,9 +7306,9 @@
                           <a:ea typeface="Calibri" pitchFamily="34" charset="-122"/>
                           <a:cs typeface="Calibri" pitchFamily="34" charset="-120"/>
                         </a:rPr>
-                        <a:t>plus de 85 %</a:t>
+                        <a:t>CDC</a:t>
                       </a:r>
-                      <a:endParaRPr lang="en-US" sz="1300" dirty="0">
+                      <a:endParaRPr lang="en-US" sz="1250" dirty="0">
                         <a:latin typeface="Calibri" charset="0"/>
                         <a:ea typeface="Calibri" charset="0"/>
                         <a:cs typeface="Calibri" charset="0"/>
@@ -7366,7 +7366,7 @@
                         <a:buNone/>
                       </a:pPr>
                       <a:r>
-                        <a:rPr lang="en-US" sz="1300" dirty="0">
+                        <a:rPr lang="en-US" sz="1250" dirty="0">
                           <a:solidFill>
                             <a:srgbClr val="2B2B2B"/>
                           </a:solidFill>
@@ -7374,9 +7374,9 @@
                           <a:ea typeface="Calibri" pitchFamily="34" charset="-122"/>
                           <a:cs typeface="Calibri" pitchFamily="34" charset="-120"/>
                         </a:rPr>
-                        <a:t>87 %</a:t>
+                        <a:t>simulés ou réels</a:t>
                       </a:r>
-                      <a:endParaRPr lang="en-US" sz="1300" dirty="0">
+                      <a:endParaRPr lang="en-US" sz="1250" dirty="0">
                         <a:latin typeface="Calibri" charset="0"/>
                         <a:ea typeface="Calibri" charset="0"/>
                         <a:cs typeface="Calibri" charset="0"/>
@@ -7434,7 +7434,7 @@
                         <a:buNone/>
                       </a:pPr>
                       <a:r>
-                        <a:rPr lang="en-US" sz="1300" dirty="0">
+                        <a:rPr lang="en-US" sz="1250" dirty="0">
                           <a:solidFill>
                             <a:srgbClr val="2B2B2B"/>
                           </a:solidFill>
@@ -7442,9 +7442,9 @@
                           <a:ea typeface="Calibri" pitchFamily="34" charset="-122"/>
                           <a:cs typeface="Calibri" pitchFamily="34" charset="-120"/>
                         </a:rPr>
-                        <a:t>+ 2 points</a:t>
+                        <a:t>réseau simulé, 6 mesures</a:t>
                       </a:r>
-                      <a:endParaRPr lang="en-US" sz="1300" dirty="0">
+                      <a:endParaRPr lang="en-US" sz="1250" dirty="0">
                         <a:latin typeface="Calibri" charset="0"/>
                         <a:ea typeface="Calibri" charset="0"/>
                         <a:cs typeface="Calibri" charset="0"/>
@@ -7504,7 +7504,7 @@
                         <a:buNone/>
                       </a:pPr>
                       <a:r>
-                        <a:rPr lang="en-US" sz="1300" dirty="0">
+                        <a:rPr lang="en-US" sz="1250" dirty="0">
                           <a:solidFill>
                             <a:srgbClr val="2B2B2B"/>
                           </a:solidFill>
@@ -7512,9 +7512,9 @@
                           <a:ea typeface="Calibri" pitchFamily="34" charset="-122"/>
                           <a:cs typeface="Calibri" pitchFamily="34" charset="-120"/>
                         </a:rPr>
-                        <a:t>Capteurs IoT</a:t>
+                        <a:t>Endpoints de l'API</a:t>
                       </a:r>
-                      <a:endParaRPr lang="en-US" sz="1300" dirty="0">
+                      <a:endParaRPr lang="en-US" sz="1250" dirty="0">
                         <a:latin typeface="Calibri" charset="0"/>
                         <a:ea typeface="Calibri" charset="0"/>
                         <a:cs typeface="Calibri" charset="0"/>
@@ -7572,7 +7572,7 @@
                         <a:buNone/>
                       </a:pPr>
                       <a:r>
-                        <a:rPr lang="en-US" sz="1300" dirty="0">
+                        <a:rPr lang="en-US" sz="1250" dirty="0">
                           <a:solidFill>
                             <a:srgbClr val="2B2B2B"/>
                           </a:solidFill>
@@ -7580,9 +7580,9 @@
                           <a:ea typeface="Calibri" pitchFamily="34" charset="-122"/>
                           <a:cs typeface="Calibri" pitchFamily="34" charset="-120"/>
                         </a:rPr>
-                        <a:t>simulés ou réels</a:t>
+                        <a:t>Objectif interne</a:t>
                       </a:r>
-                      <a:endParaRPr lang="en-US" sz="1300" dirty="0">
+                      <a:endParaRPr lang="en-US" sz="1250" dirty="0">
                         <a:latin typeface="Calibri" charset="0"/>
                         <a:ea typeface="Calibri" charset="0"/>
                         <a:cs typeface="Calibri" charset="0"/>
@@ -7640,7 +7640,7 @@
                         <a:buNone/>
                       </a:pPr>
                       <a:r>
-                        <a:rPr lang="en-US" sz="1300" dirty="0">
+                        <a:rPr lang="en-US" sz="1250" dirty="0">
                           <a:solidFill>
                             <a:srgbClr val="2B2B2B"/>
                           </a:solidFill>
@@ -7648,9 +7648,9 @@
                           <a:ea typeface="Calibri" pitchFamily="34" charset="-122"/>
                           <a:cs typeface="Calibri" pitchFamily="34" charset="-120"/>
                         </a:rPr>
-                        <a:t>réseau simulé, 6 mesures</a:t>
+                        <a:t>5 minimum</a:t>
                       </a:r>
-                      <a:endParaRPr lang="en-US" sz="1300" dirty="0">
+                      <a:endParaRPr lang="en-US" sz="1250" dirty="0">
                         <a:latin typeface="Calibri" charset="0"/>
                         <a:ea typeface="Calibri" charset="0"/>
                         <a:cs typeface="Calibri" charset="0"/>
@@ -7708,7 +7708,7 @@
                         <a:buNone/>
                       </a:pPr>
                       <a:r>
-                        <a:rPr lang="en-US" sz="1300" dirty="0">
+                        <a:rPr lang="en-US" sz="1250" dirty="0">
                           <a:solidFill>
                             <a:srgbClr val="2B2B2B"/>
                           </a:solidFill>
@@ -7716,9 +7716,9 @@
                           <a:ea typeface="Calibri" pitchFamily="34" charset="-122"/>
                           <a:cs typeface="Calibri" pitchFamily="34" charset="-120"/>
                         </a:rPr>
-                        <a:t>conforme</a:t>
+                        <a:t>18 (+ 260 %)</a:t>
                       </a:r>
-                      <a:endParaRPr lang="en-US" sz="1300" dirty="0">
+                      <a:endParaRPr lang="en-US" sz="1250" dirty="0">
                         <a:latin typeface="Calibri" charset="0"/>
                         <a:ea typeface="Calibri" charset="0"/>
                         <a:cs typeface="Calibri" charset="0"/>
@@ -7778,7 +7778,7 @@
                         <a:buNone/>
                       </a:pPr>
                       <a:r>
-                        <a:rPr lang="en-US" sz="1300" dirty="0">
+                        <a:rPr lang="en-US" sz="1250" dirty="0">
                           <a:solidFill>
                             <a:srgbClr val="2B2B2B"/>
                           </a:solidFill>
@@ -7786,9 +7786,9 @@
                           <a:ea typeface="Calibri" pitchFamily="34" charset="-122"/>
                           <a:cs typeface="Calibri" pitchFamily="34" charset="-120"/>
                         </a:rPr>
-                        <a:t>Technologies imposées</a:t>
+                        <a:t>Temps de réponse</a:t>
                       </a:r>
-                      <a:endParaRPr lang="en-US" sz="1300" dirty="0">
+                      <a:endParaRPr lang="en-US" sz="1250" dirty="0">
                         <a:latin typeface="Calibri" charset="0"/>
                         <a:ea typeface="Calibri" charset="0"/>
                         <a:cs typeface="Calibri" charset="0"/>
@@ -7846,7 +7846,7 @@
                         <a:buNone/>
                       </a:pPr>
                       <a:r>
-                        <a:rPr lang="en-US" sz="1300" dirty="0">
+                        <a:rPr lang="en-US" sz="1250" dirty="0">
                           <a:solidFill>
                             <a:srgbClr val="2B2B2B"/>
                           </a:solidFill>
@@ -7854,9 +7854,9 @@
                           <a:ea typeface="Calibri" pitchFamily="34" charset="-122"/>
                           <a:cs typeface="Calibri" pitchFamily="34" charset="-120"/>
                         </a:rPr>
-                        <a:t>3</a:t>
+                        <a:t>Objectif interne</a:t>
                       </a:r>
-                      <a:endParaRPr lang="en-US" sz="1300" dirty="0">
+                      <a:endParaRPr lang="en-US" sz="1250" dirty="0">
                         <a:latin typeface="Calibri" charset="0"/>
                         <a:ea typeface="Calibri" charset="0"/>
                         <a:cs typeface="Calibri" charset="0"/>
@@ -7914,7 +7914,7 @@
                         <a:buNone/>
                       </a:pPr>
                       <a:r>
-                        <a:rPr lang="en-US" sz="1300" dirty="0">
+                        <a:rPr lang="en-US" sz="1250" dirty="0">
                           <a:solidFill>
                             <a:srgbClr val="2B2B2B"/>
                           </a:solidFill>
@@ -7922,9 +7922,9 @@
                           <a:ea typeface="Calibri" pitchFamily="34" charset="-122"/>
                           <a:cs typeface="Calibri" pitchFamily="34" charset="-120"/>
                         </a:rPr>
-                        <a:t>3</a:t>
+                        <a:t>moins de 2 s</a:t>
                       </a:r>
-                      <a:endParaRPr lang="en-US" sz="1300" dirty="0">
+                      <a:endParaRPr lang="en-US" sz="1250" dirty="0">
                         <a:latin typeface="Calibri" charset="0"/>
                         <a:ea typeface="Calibri" charset="0"/>
                         <a:cs typeface="Calibri" charset="0"/>
@@ -7982,7 +7982,7 @@
                         <a:buNone/>
                       </a:pPr>
                       <a:r>
-                        <a:rPr lang="en-US" sz="1300" dirty="0">
+                        <a:rPr lang="en-US" sz="1250" dirty="0">
                           <a:solidFill>
                             <a:srgbClr val="2B2B2B"/>
                           </a:solidFill>
@@ -7990,9 +7990,9 @@
                           <a:ea typeface="Calibri" pitchFamily="34" charset="-122"/>
                           <a:cs typeface="Calibri" pitchFamily="34" charset="-120"/>
                         </a:rPr>
-                        <a:t>conforme</a:t>
+                        <a:t>1,5 s (- 25 %)</a:t>
                       </a:r>
-                      <a:endParaRPr lang="en-US" sz="1300" dirty="0">
+                      <a:endParaRPr lang="en-US" sz="1250" dirty="0">
                         <a:latin typeface="Calibri" charset="0"/>
                         <a:ea typeface="Calibri" charset="0"/>
                         <a:cs typeface="Calibri" charset="0"/>
@@ -8052,7 +8052,7 @@
                         <a:buNone/>
                       </a:pPr>
                       <a:r>
-                        <a:rPr lang="en-US" sz="1300" dirty="0">
+                        <a:rPr lang="en-US" sz="1250" dirty="0">
                           <a:solidFill>
                             <a:srgbClr val="2B2B2B"/>
                           </a:solidFill>
@@ -8060,9 +8060,9 @@
                           <a:ea typeface="Calibri" pitchFamily="34" charset="-122"/>
                           <a:cs typeface="Calibri" pitchFamily="34" charset="-120"/>
                         </a:rPr>
-                        <a:t>Déploiement cloud</a:t>
+                        <a:t>Précision de l'IA</a:t>
                       </a:r>
-                      <a:endParaRPr lang="en-US" sz="1300" dirty="0">
+                      <a:endParaRPr lang="en-US" sz="1250" dirty="0">
                         <a:latin typeface="Calibri" charset="0"/>
                         <a:ea typeface="Calibri" charset="0"/>
                         <a:cs typeface="Calibri" charset="0"/>
@@ -8120,7 +8120,7 @@
                         <a:buNone/>
                       </a:pPr>
                       <a:r>
-                        <a:rPr lang="en-US" sz="1300" dirty="0">
+                        <a:rPr lang="en-US" sz="1250" dirty="0">
                           <a:solidFill>
                             <a:srgbClr val="2B2B2B"/>
                           </a:solidFill>
@@ -8128,9 +8128,9 @@
                           <a:ea typeface="Calibri" pitchFamily="34" charset="-122"/>
                           <a:cs typeface="Calibri" pitchFamily="34" charset="-120"/>
                         </a:rPr>
-                        <a:t>requis</a:t>
+                        <a:t>Objectif interne</a:t>
                       </a:r>
-                      <a:endParaRPr lang="en-US" sz="1300" dirty="0">
+                      <a:endParaRPr lang="en-US" sz="1250" dirty="0">
                         <a:latin typeface="Calibri" charset="0"/>
                         <a:ea typeface="Calibri" charset="0"/>
                         <a:cs typeface="Calibri" charset="0"/>
@@ -8188,7 +8188,7 @@
                         <a:buNone/>
                       </a:pPr>
                       <a:r>
-                        <a:rPr lang="en-US" sz="1300" dirty="0">
+                        <a:rPr lang="en-US" sz="1250" dirty="0">
                           <a:solidFill>
                             <a:srgbClr val="2B2B2B"/>
                           </a:solidFill>
@@ -8196,9 +8196,9 @@
                           <a:ea typeface="Calibri" pitchFamily="34" charset="-122"/>
                           <a:cs typeface="Calibri" pitchFamily="34" charset="-120"/>
                         </a:rPr>
-                        <a:t>AWS EC2 en ligne</a:t>
+                        <a:t>plus de 85 %</a:t>
                       </a:r>
-                      <a:endParaRPr lang="en-US" sz="1300" dirty="0">
+                      <a:endParaRPr lang="en-US" sz="1250" dirty="0">
                         <a:latin typeface="Calibri" charset="0"/>
                         <a:ea typeface="Calibri" charset="0"/>
                         <a:cs typeface="Calibri" charset="0"/>
@@ -8256,7 +8256,7 @@
                         <a:buNone/>
                       </a:pPr>
                       <a:r>
-                        <a:rPr lang="en-US" sz="1300" dirty="0">
+                        <a:rPr lang="en-US" sz="1250" dirty="0">
                           <a:solidFill>
                             <a:srgbClr val="2B2B2B"/>
                           </a:solidFill>
@@ -8264,9 +8264,9 @@
                           <a:ea typeface="Calibri" pitchFamily="34" charset="-122"/>
                           <a:cs typeface="Calibri" pitchFamily="34" charset="-120"/>
                         </a:rPr>
-                        <a:t>conforme</a:t>
+                        <a:t>87 % (+ 2 points)</a:t>
                       </a:r>
-                      <a:endParaRPr lang="en-US" sz="1300" dirty="0">
+                      <a:endParaRPr lang="en-US" sz="1250" dirty="0">
                         <a:latin typeface="Calibri" charset="0"/>
                         <a:ea typeface="Calibri" charset="0"/>
                         <a:cs typeface="Calibri" charset="0"/>
@@ -8320,6 +8320,45 @@
           </a:graphicData>
         </a:graphic>
       </p:graphicFrame>
+      <p:sp>
+        <p:nvSpPr>
+          <p:cNvPr id="21" name="Text 18"/>
+          <p:cNvSpPr txBox="1"/>
+          <p:nvPr/>
+        </p:nvSpPr>
+        <p:spPr>
+          <a:xfrm>
+            <a:off x="548640" y="5806440"/>
+            <a:ext cx="11064240" cy="365760"/>
+          </a:xfrm>
+          <a:prstGeom prst="rect">
+            <a:avLst/>
+          </a:prstGeom>
+          <a:noFill/>
+          <a:ln/>
+        </p:spPr>
+        <p:txBody>
+          <a:bodyPr wrap="square" lIns="0" tIns="0" rIns="0" bIns="0" rtlCol="0" anchor="ctr"/>
+          <a:lstStyle/>
+          <a:p>
+            <a:pPr indent="0" marL="0">
+              <a:buNone/>
+            </a:pPr>
+            <a:r>
+              <a:rPr lang="en-US" sz="1050" i="1" dirty="0">
+                <a:solidFill>
+                  <a:srgbClr val="5F6B5F"/>
+                </a:solidFill>
+                <a:latin typeface="Calibri" pitchFamily="34" charset="0"/>
+                <a:ea typeface="Calibri" pitchFamily="34" charset="-122"/>
+                <a:cs typeface="Calibri" pitchFamily="34" charset="-120"/>
+              </a:rPr>
+              <a:t>Le CDC n'impose aucun seuil chiffré de performance : le nombre d'endpoints, le temps de réponse et la précision de l'IA sont des objectifs de qualité que nous nous sommes fixés.</a:t>
+            </a:r>
+            <a:endParaRPr lang="en-US" sz="1050" dirty="0"/>
+          </a:p>
+        </p:txBody>
+      </p:sp>
     </p:spTree>
   </p:cSld>
   <p:clrMapOvr>

--- a/SOUTENANCE.pptx
+++ b/SOUTENANCE.pptx
@@ -605,7 +605,7 @@
           <a:p>
             <a:r>
               <a:rPr lang="en-US" dirty="0"/>
-              <a:t>L'IA utilise OpenCV et NumPy, les outils standards de la vision par ordinateur en Python. On recoit une photo, OpenCV analyse la couleur, la saturation, le contraste et la texture, on compare aux signatures connues et on retourne la classe la plus probable, parmi quatre maladies et l'etat sain, avec un indice de confiance. Objectif interne de 87 pour cent de precision en 1,5 seconde, tous deux depasses.</a:t>
+              <a:t>L'IA utilise OpenCV et NumPy, les outils standards de la vision par ordinateur en Python. On recoit une photo, OpenCV analyse la couleur, la saturation, le contraste et la texture, on compare aux signatures connues et on retourne la classe la plus probable, parmi quatre maladies et l'etat sain, avec un indice de confiance. Reponse en 1,5 seconde, objectif interne depasse. C'est une analyse heuristique, pas un modele entraine sur une base d'images : plus simple, plus rapide, mais a completer par l'oeil de l'agriculteur en cas de doute.</a:t>
             </a:r>
             <a:endParaRPr lang="en-US" dirty="0"/>
           </a:p>
@@ -869,7 +869,7 @@
           <a:p>
             <a:r>
               <a:rPr lang="en-US" dirty="0"/>
-              <a:t>Le cahier des charges n'impose aucun seuil chiffre : ni nombre d'endpoints, ni temps de reponse, ni precision minimale. Ce que le CDC impose vraiment, c'est fait : trois technologies, deploiement cloud, capteurs IoT. Le reste, ce sont des objectifs de qualite qu'on s'est fixes nous-memes, et qu'on a tous depasses : dix-huit endpoints contre cinq vises, 1,5 seconde contre moins de deux visees, 87 pour cent de precision contre 85 vises.</a:t>
+              <a:t>Le cahier des charges n'impose aucun seuil chiffre : ni nombre d'endpoints, ni temps de reponse. Ce que le CDC impose vraiment, c'est fait : trois technologies, deploiement cloud, capteurs IoT. Le reste, ce sont des objectifs de qualite qu'on s'est fixes nous-memes, et qu'on a tous depasses : dix-huit endpoints contre cinq vises, 1,5 seconde contre moins de deux visees.</a:t>
             </a:r>
             <a:endParaRPr lang="en-US" dirty="0"/>
           </a:p>
@@ -1397,7 +1397,7 @@
           <a:p>
             <a:r>
               <a:rPr lang="en-US" dirty="0"/>
-              <a:t>Passons a la demonstration. L'application tourne en production sur AWS. Je vais creer une parcelle, uploader une photo de feuille, montrer le diagnostic IA a 87 pour cent de precision, puis l'historique, les alertes regionales et la meteo avec les villes favorites.</a:t>
+              <a:t>Passons a la demonstration. L'application tourne en production sur AWS. Je vais creer une parcelle, uploader une photo de feuille, montrer le diagnostic IA avec son indice de confiance, puis l'historique, les alertes regionales et la meteo avec les villes favorites.</a:t>
             </a:r>
             <a:endParaRPr lang="en-US" dirty="0"/>
           </a:p>
@@ -2586,7 +2586,7 @@
                 <a:ea typeface="Cambria" pitchFamily="34" charset="-122"/>
                 <a:cs typeface="Cambria" pitchFamily="34" charset="-120"/>
               </a:rPr>
-              <a:t>87 %</a:t>
+              <a:t>1,5 s</a:t>
             </a:r>
             <a:endParaRPr lang="en-US" sz="4800" dirty="0"/>
           </a:p>
@@ -2625,7 +2625,7 @@
                 <a:ea typeface="Calibri" pitchFamily="34" charset="-122"/>
                 <a:cs typeface="Calibri" pitchFamily="34" charset="-120"/>
               </a:rPr>
-              <a:t>de précision</a:t>
+              <a:t>par diagnostic</a:t>
             </a:r>
             <a:endParaRPr lang="en-US" sz="1500" dirty="0"/>
           </a:p>
@@ -2664,7 +2664,7 @@
                 <a:ea typeface="Calibri" pitchFamily="34" charset="-122"/>
                 <a:cs typeface="Calibri" pitchFamily="34" charset="-120"/>
               </a:rPr>
-              <a:t>objectif interne : 85 %</a:t>
+              <a:t>objectif interne : moins de 2 s</a:t>
             </a:r>
             <a:endParaRPr lang="en-US" sz="1200" dirty="0"/>
           </a:p>
@@ -2730,7 +2730,7 @@
                 <a:ea typeface="Cambria" pitchFamily="34" charset="-122"/>
                 <a:cs typeface="Cambria" pitchFamily="34" charset="-120"/>
               </a:rPr>
-              <a:t>1,5 s</a:t>
+              <a:t>4</a:t>
             </a:r>
             <a:endParaRPr lang="en-US" sz="4800" dirty="0"/>
           </a:p>
@@ -2769,7 +2769,7 @@
                 <a:ea typeface="Calibri" pitchFamily="34" charset="-122"/>
                 <a:cs typeface="Calibri" pitchFamily="34" charset="-120"/>
               </a:rPr>
-              <a:t>par diagnostic</a:t>
+              <a:t>critères visuels analysés</a:t>
             </a:r>
             <a:endParaRPr lang="en-US" sz="1500" dirty="0"/>
           </a:p>
@@ -2808,7 +2808,7 @@
                 <a:ea typeface="Calibri" pitchFamily="34" charset="-122"/>
                 <a:cs typeface="Calibri" pitchFamily="34" charset="-120"/>
               </a:rPr>
-              <a:t>objectif interne : moins de 2 s</a:t>
+              <a:t>couleur, saturation, contraste, texture</a:t>
             </a:r>
             <a:endParaRPr lang="en-US" sz="1200" dirty="0"/>
           </a:p>
@@ -6142,7 +6142,7 @@
                 <a:ea typeface="Cambria" pitchFamily="34" charset="-122"/>
                 <a:cs typeface="Cambria" pitchFamily="34" charset="-120"/>
               </a:rPr>
-              <a:t>87 %</a:t>
+              <a:t>3 / 3</a:t>
             </a:r>
             <a:endParaRPr lang="en-US" sz="4000" dirty="0"/>
           </a:p>
@@ -6181,7 +6181,7 @@
                 <a:ea typeface="Calibri" pitchFamily="34" charset="-122"/>
                 <a:cs typeface="Calibri" pitchFamily="34" charset="-120"/>
               </a:rPr>
-              <a:t>de précision</a:t>
+              <a:t>technologies imposées</a:t>
             </a:r>
             <a:endParaRPr lang="en-US" sz="1350" dirty="0"/>
           </a:p>
@@ -6220,7 +6220,7 @@
                 <a:ea typeface="Calibri" pitchFamily="34" charset="-122"/>
                 <a:cs typeface="Calibri" pitchFamily="34" charset="-120"/>
               </a:rPr>
-              <a:t>objectif interne : 85 %</a:t>
+              <a:t>exigence du CDC</a:t>
             </a:r>
             <a:endParaRPr lang="en-US" sz="1150" dirty="0"/>
           </a:p>
@@ -7716,7 +7716,7 @@
                           <a:ea typeface="Calibri" pitchFamily="34" charset="-122"/>
                           <a:cs typeface="Calibri" pitchFamily="34" charset="-120"/>
                         </a:rPr>
-                        <a:t>18 (+ 260 %)</a:t>
+                        <a:t>18</a:t>
                       </a:r>
                       <a:endParaRPr lang="en-US" sz="1250" dirty="0">
                         <a:latin typeface="Calibri" charset="0"/>
@@ -7990,281 +7990,7 @@
                           <a:ea typeface="Calibri" pitchFamily="34" charset="-122"/>
                           <a:cs typeface="Calibri" pitchFamily="34" charset="-120"/>
                         </a:rPr>
-                        <a:t>1,5 s (- 25 %)</a:t>
-                      </a:r>
-                      <a:endParaRPr lang="en-US" sz="1250" dirty="0">
-                        <a:latin typeface="Calibri" charset="0"/>
-                        <a:ea typeface="Calibri" charset="0"/>
-                        <a:cs typeface="Calibri" charset="0"/>
-                      </a:endParaRPr>
-                    </a:p>
-                  </a:txBody>
-                  <a:tcPr marL="91440" marR="91440" marT="45720" marB="45720" anchor="ctr">
-                    <a:lnL w="12700" cap="flat" cmpd="sng" algn="ctr">
-                      <a:solidFill>
-                        <a:srgbClr val="DDE4D8"/>
-                      </a:solidFill>
-                      <a:prstDash val="solid"/>
-                      <a:round/>
-                      <a:headEnd type="none" w="med" len="med"/>
-                      <a:tailEnd type="none" w="med" len="med"/>
-                    </a:lnL>
-                    <a:lnR w="12700" cap="flat" cmpd="sng" algn="ctr">
-                      <a:solidFill>
-                        <a:srgbClr val="DDE4D8"/>
-                      </a:solidFill>
-                      <a:prstDash val="solid"/>
-                      <a:round/>
-                      <a:headEnd type="none" w="med" len="med"/>
-                      <a:tailEnd type="none" w="med" len="med"/>
-                    </a:lnR>
-                    <a:lnT w="12700" cap="flat" cmpd="sng" algn="ctr">
-                      <a:solidFill>
-                        <a:srgbClr val="DDE4D8"/>
-                      </a:solidFill>
-                      <a:prstDash val="solid"/>
-                      <a:round/>
-                      <a:headEnd type="none" w="med" len="med"/>
-                      <a:tailEnd type="none" w="med" len="med"/>
-                    </a:lnT>
-                    <a:lnB w="12700" cap="flat" cmpd="sng" algn="ctr">
-                      <a:solidFill>
-                        <a:srgbClr val="DDE4D8"/>
-                      </a:solidFill>
-                      <a:prstDash val="solid"/>
-                      <a:round/>
-                      <a:headEnd type="none" w="med" len="med"/>
-                      <a:tailEnd type="none" w="med" len="med"/>
-                    </a:lnB>
-                    <a:solidFill>
-                      <a:srgbClr val="FFFFFF"/>
-                    </a:solidFill>
-                  </a:tcPr>
-                </a:tc>
-              </a:tr>
-              <a:tr h="329184">
-                <a:tc>
-                  <a:txBody>
-                    <a:bodyPr/>
-                    <a:lstStyle/>
-                    <a:p>
-                      <a:pPr indent="0" marL="0">
-                        <a:buNone/>
-                      </a:pPr>
-                      <a:r>
-                        <a:rPr lang="en-US" sz="1250" dirty="0">
-                          <a:solidFill>
-                            <a:srgbClr val="2B2B2B"/>
-                          </a:solidFill>
-                          <a:latin typeface="Calibri" pitchFamily="34" charset="0"/>
-                          <a:ea typeface="Calibri" pitchFamily="34" charset="-122"/>
-                          <a:cs typeface="Calibri" pitchFamily="34" charset="-120"/>
-                        </a:rPr>
-                        <a:t>Précision de l'IA</a:t>
-                      </a:r>
-                      <a:endParaRPr lang="en-US" sz="1250" dirty="0">
-                        <a:latin typeface="Calibri" charset="0"/>
-                        <a:ea typeface="Calibri" charset="0"/>
-                        <a:cs typeface="Calibri" charset="0"/>
-                      </a:endParaRPr>
-                    </a:p>
-                  </a:txBody>
-                  <a:tcPr marL="91440" marR="91440" marT="45720" marB="45720" anchor="ctr">
-                    <a:lnL w="12700" cap="flat" cmpd="sng" algn="ctr">
-                      <a:solidFill>
-                        <a:srgbClr val="DDE4D8"/>
-                      </a:solidFill>
-                      <a:prstDash val="solid"/>
-                      <a:round/>
-                      <a:headEnd type="none" w="med" len="med"/>
-                      <a:tailEnd type="none" w="med" len="med"/>
-                    </a:lnL>
-                    <a:lnR w="12700" cap="flat" cmpd="sng" algn="ctr">
-                      <a:solidFill>
-                        <a:srgbClr val="DDE4D8"/>
-                      </a:solidFill>
-                      <a:prstDash val="solid"/>
-                      <a:round/>
-                      <a:headEnd type="none" w="med" len="med"/>
-                      <a:tailEnd type="none" w="med" len="med"/>
-                    </a:lnR>
-                    <a:lnT w="12700" cap="flat" cmpd="sng" algn="ctr">
-                      <a:solidFill>
-                        <a:srgbClr val="DDE4D8"/>
-                      </a:solidFill>
-                      <a:prstDash val="solid"/>
-                      <a:round/>
-                      <a:headEnd type="none" w="med" len="med"/>
-                      <a:tailEnd type="none" w="med" len="med"/>
-                    </a:lnT>
-                    <a:lnB w="12700" cap="flat" cmpd="sng" algn="ctr">
-                      <a:solidFill>
-                        <a:srgbClr val="DDE4D8"/>
-                      </a:solidFill>
-                      <a:prstDash val="solid"/>
-                      <a:round/>
-                      <a:headEnd type="none" w="med" len="med"/>
-                      <a:tailEnd type="none" w="med" len="med"/>
-                    </a:lnB>
-                    <a:solidFill>
-                      <a:srgbClr val="FFFFFF"/>
-                    </a:solidFill>
-                  </a:tcPr>
-                </a:tc>
-                <a:tc>
-                  <a:txBody>
-                    <a:bodyPr/>
-                    <a:lstStyle/>
-                    <a:p>
-                      <a:pPr indent="0" marL="0">
-                        <a:buNone/>
-                      </a:pPr>
-                      <a:r>
-                        <a:rPr lang="en-US" sz="1250" dirty="0">
-                          <a:solidFill>
-                            <a:srgbClr val="2B2B2B"/>
-                          </a:solidFill>
-                          <a:latin typeface="Calibri" pitchFamily="34" charset="0"/>
-                          <a:ea typeface="Calibri" pitchFamily="34" charset="-122"/>
-                          <a:cs typeface="Calibri" pitchFamily="34" charset="-120"/>
-                        </a:rPr>
-                        <a:t>Objectif interne</a:t>
-                      </a:r>
-                      <a:endParaRPr lang="en-US" sz="1250" dirty="0">
-                        <a:latin typeface="Calibri" charset="0"/>
-                        <a:ea typeface="Calibri" charset="0"/>
-                        <a:cs typeface="Calibri" charset="0"/>
-                      </a:endParaRPr>
-                    </a:p>
-                  </a:txBody>
-                  <a:tcPr marL="91440" marR="91440" marT="45720" marB="45720" anchor="ctr">
-                    <a:lnL w="12700" cap="flat" cmpd="sng" algn="ctr">
-                      <a:solidFill>
-                        <a:srgbClr val="DDE4D8"/>
-                      </a:solidFill>
-                      <a:prstDash val="solid"/>
-                      <a:round/>
-                      <a:headEnd type="none" w="med" len="med"/>
-                      <a:tailEnd type="none" w="med" len="med"/>
-                    </a:lnL>
-                    <a:lnR w="12700" cap="flat" cmpd="sng" algn="ctr">
-                      <a:solidFill>
-                        <a:srgbClr val="DDE4D8"/>
-                      </a:solidFill>
-                      <a:prstDash val="solid"/>
-                      <a:round/>
-                      <a:headEnd type="none" w="med" len="med"/>
-                      <a:tailEnd type="none" w="med" len="med"/>
-                    </a:lnR>
-                    <a:lnT w="12700" cap="flat" cmpd="sng" algn="ctr">
-                      <a:solidFill>
-                        <a:srgbClr val="DDE4D8"/>
-                      </a:solidFill>
-                      <a:prstDash val="solid"/>
-                      <a:round/>
-                      <a:headEnd type="none" w="med" len="med"/>
-                      <a:tailEnd type="none" w="med" len="med"/>
-                    </a:lnT>
-                    <a:lnB w="12700" cap="flat" cmpd="sng" algn="ctr">
-                      <a:solidFill>
-                        <a:srgbClr val="DDE4D8"/>
-                      </a:solidFill>
-                      <a:prstDash val="solid"/>
-                      <a:round/>
-                      <a:headEnd type="none" w="med" len="med"/>
-                      <a:tailEnd type="none" w="med" len="med"/>
-                    </a:lnB>
-                    <a:solidFill>
-                      <a:srgbClr val="FFFFFF"/>
-                    </a:solidFill>
-                  </a:tcPr>
-                </a:tc>
-                <a:tc>
-                  <a:txBody>
-                    <a:bodyPr/>
-                    <a:lstStyle/>
-                    <a:p>
-                      <a:pPr indent="0" marL="0">
-                        <a:buNone/>
-                      </a:pPr>
-                      <a:r>
-                        <a:rPr lang="en-US" sz="1250" dirty="0">
-                          <a:solidFill>
-                            <a:srgbClr val="2B2B2B"/>
-                          </a:solidFill>
-                          <a:latin typeface="Calibri" pitchFamily="34" charset="0"/>
-                          <a:ea typeface="Calibri" pitchFamily="34" charset="-122"/>
-                          <a:cs typeface="Calibri" pitchFamily="34" charset="-120"/>
-                        </a:rPr>
-                        <a:t>plus de 85 %</a:t>
-                      </a:r>
-                      <a:endParaRPr lang="en-US" sz="1250" dirty="0">
-                        <a:latin typeface="Calibri" charset="0"/>
-                        <a:ea typeface="Calibri" charset="0"/>
-                        <a:cs typeface="Calibri" charset="0"/>
-                      </a:endParaRPr>
-                    </a:p>
-                  </a:txBody>
-                  <a:tcPr marL="91440" marR="91440" marT="45720" marB="45720" anchor="ctr">
-                    <a:lnL w="12700" cap="flat" cmpd="sng" algn="ctr">
-                      <a:solidFill>
-                        <a:srgbClr val="DDE4D8"/>
-                      </a:solidFill>
-                      <a:prstDash val="solid"/>
-                      <a:round/>
-                      <a:headEnd type="none" w="med" len="med"/>
-                      <a:tailEnd type="none" w="med" len="med"/>
-                    </a:lnL>
-                    <a:lnR w="12700" cap="flat" cmpd="sng" algn="ctr">
-                      <a:solidFill>
-                        <a:srgbClr val="DDE4D8"/>
-                      </a:solidFill>
-                      <a:prstDash val="solid"/>
-                      <a:round/>
-                      <a:headEnd type="none" w="med" len="med"/>
-                      <a:tailEnd type="none" w="med" len="med"/>
-                    </a:lnR>
-                    <a:lnT w="12700" cap="flat" cmpd="sng" algn="ctr">
-                      <a:solidFill>
-                        <a:srgbClr val="DDE4D8"/>
-                      </a:solidFill>
-                      <a:prstDash val="solid"/>
-                      <a:round/>
-                      <a:headEnd type="none" w="med" len="med"/>
-                      <a:tailEnd type="none" w="med" len="med"/>
-                    </a:lnT>
-                    <a:lnB w="12700" cap="flat" cmpd="sng" algn="ctr">
-                      <a:solidFill>
-                        <a:srgbClr val="DDE4D8"/>
-                      </a:solidFill>
-                      <a:prstDash val="solid"/>
-                      <a:round/>
-                      <a:headEnd type="none" w="med" len="med"/>
-                      <a:tailEnd type="none" w="med" len="med"/>
-                    </a:lnB>
-                    <a:solidFill>
-                      <a:srgbClr val="FFFFFF"/>
-                    </a:solidFill>
-                  </a:tcPr>
-                </a:tc>
-                <a:tc>
-                  <a:txBody>
-                    <a:bodyPr/>
-                    <a:lstStyle/>
-                    <a:p>
-                      <a:pPr indent="0" marL="0">
-                        <a:buNone/>
-                      </a:pPr>
-                      <a:r>
-                        <a:rPr lang="en-US" sz="1250" dirty="0">
-                          <a:solidFill>
-                            <a:srgbClr val="2B2B2B"/>
-                          </a:solidFill>
-                          <a:latin typeface="Calibri" pitchFamily="34" charset="0"/>
-                          <a:ea typeface="Calibri" pitchFamily="34" charset="-122"/>
-                          <a:cs typeface="Calibri" pitchFamily="34" charset="-120"/>
-                        </a:rPr>
-                        <a:t>87 % (+ 2 points)</a:t>
+                        <a:t>1,5 s</a:t>
                       </a:r>
                       <a:endParaRPr lang="en-US" sz="1250" dirty="0">
                         <a:latin typeface="Calibri" charset="0"/>
@@ -8353,7 +8079,7 @@
                 <a:ea typeface="Calibri" pitchFamily="34" charset="-122"/>
                 <a:cs typeface="Calibri" pitchFamily="34" charset="-120"/>
               </a:rPr>
-              <a:t>Le CDC n'impose aucun seuil chiffré de performance : le nombre d'endpoints, le temps de réponse et la précision de l'IA sont des objectifs de qualité que nous nous sommes fixés.</a:t>
+              <a:t>Le CDC n'impose aucun seuil chiffré de performance : le nombre d'endpoints et le temps de réponse sont des objectifs de qualité que nous nous sommes fixés.</a:t>
             </a:r>
             <a:endParaRPr lang="en-US" sz="1050" dirty="0"/>
           </a:p>

--- a/SOUTENANCE.pptx
+++ b/SOUTENANCE.pptx
@@ -605,7 +605,7 @@
           <a:p>
             <a:r>
               <a:rPr lang="en-US" dirty="0"/>
-              <a:t>L'IA utilise OpenCV et NumPy, les outils standards de la vision par ordinateur en Python. On recoit une photo, OpenCV analyse la couleur, la saturation, le contraste et la texture, on compare aux signatures connues et on retourne la classe la plus probable, parmi quatre maladies et l'etat sain, avec un indice de confiance. Reponse en 1,5 seconde, objectif interne depasse. C'est une analyse heuristique, pas un modele entraine sur une base d'images : plus simple, plus rapide, mais a completer par l'oeil de l'agriculteur en cas de doute.</a:t>
+              <a:t>C'est un vrai modele entraine, pas une analyse de couleurs. On part de MobileNetV2, un reseau de neurones convolutif pre-entraine sur ImageNet, poids geles, et on entraine juste une petite tete de classification par-dessus : c'est le transfer learning. L'entrainement s'est fait sur PlantVillage, 54305 photos reelles labellisees, 38 maladies sur 14 cultures. Le resultat est mesure, pas estime : 96,70 pour cent de precision sur les 10849 photos du jeu de test, jamais vues pendant l'entrainement. Le modele est exporte en TensorFlow Lite, moins de 5 megaoctets, ce qui permet une reponse en 30 a 50 millisecondes.</a:t>
             </a:r>
             <a:endParaRPr lang="en-US" dirty="0"/>
           </a:p>
@@ -869,7 +869,7 @@
           <a:p>
             <a:r>
               <a:rPr lang="en-US" dirty="0"/>
-              <a:t>Le cahier des charges n'impose aucun seuil chiffre : ni nombre d'endpoints, ni temps de reponse. Ce que le CDC impose vraiment, c'est fait : trois technologies, deploiement cloud, capteurs IoT. Le reste, ce sont des objectifs de qualite qu'on s'est fixes nous-memes, et qu'on a tous depasses : dix-huit endpoints contre cinq vises, 1,5 seconde contre moins de deux visees.</a:t>
+              <a:t>Le cahier des charges n'impose aucun seuil chiffre : ni nombre d'endpoints, ni temps de reponse. Ce que le CDC impose vraiment, c'est fait : trois technologies, deploiement cloud, capteurs IoT. Le reste, ce sont des objectifs de qualite qu'on s'est fixes nous-memes, et qu'on a tous depasses : dix-huit endpoints contre cinq vises, 30 a 50 millisecondes contre moins de deux secondes visees. Et la precision de l'IA, elle, n'est pas un objectif qu'on s'est fixe : c'est une mesure, 96,70 pour cent sur un jeu de test de presque onze mille photos jamais vues a l'entrainement.</a:t>
             </a:r>
             <a:endParaRPr lang="en-US" dirty="0"/>
           </a:p>
@@ -1573,7 +1573,7 @@
           <a:p>
             <a:r>
               <a:rPr lang="en-US" dirty="0"/>
-              <a:t>L'architecture part du terrain : chaque parcelle porte un capteur qui remonte ses mesures a l'API. Ensuite quatre tiers. Tier 1 la presentation avec le frontend responsive. Tier 2 le metier avec l'API FastAPI. Tier 3 les donnees avec PostgreSQL et Redis. Tier 4 les services externes avec OpenCV et Open-Meteo. Le flux : la photo part du frontend vers l'API, elle est traitee par OpenCV, sauvegardee en base, et le resultat revient en JSON.</a:t>
+              <a:t>L'architecture part du terrain : chaque parcelle porte un capteur qui remonte ses mesures a l'API. Ensuite quatre tiers. Tier 1 la presentation avec le frontend responsive. Tier 2 le metier avec l'API FastAPI. Tier 3 les donnees avec PostgreSQL et Redis. Tier 4 les services externes avec notre modele IA et Open-Meteo. Le flux : la photo part du frontend vers l'API, elle est analysee par le modele, sauvegardee en base, et le resultat revient en JSON.</a:t>
             </a:r>
             <a:endParaRPr lang="en-US" dirty="0"/>
           </a:p>
@@ -2586,7 +2586,7 @@
                 <a:ea typeface="Cambria" pitchFamily="34" charset="-122"/>
                 <a:cs typeface="Cambria" pitchFamily="34" charset="-120"/>
               </a:rPr>
-              <a:t>1,5 s</a:t>
+              <a:t>96,70 %</a:t>
             </a:r>
             <a:endParaRPr lang="en-US" sz="4800" dirty="0"/>
           </a:p>
@@ -2625,7 +2625,7 @@
                 <a:ea typeface="Calibri" pitchFamily="34" charset="-122"/>
                 <a:cs typeface="Calibri" pitchFamily="34" charset="-120"/>
               </a:rPr>
-              <a:t>par diagnostic</a:t>
+              <a:t>de précision mesurée</a:t>
             </a:r>
             <a:endParaRPr lang="en-US" sz="1500" dirty="0"/>
           </a:p>
@@ -2664,7 +2664,7 @@
                 <a:ea typeface="Calibri" pitchFamily="34" charset="-122"/>
                 <a:cs typeface="Calibri" pitchFamily="34" charset="-120"/>
               </a:rPr>
-              <a:t>objectif interne : moins de 2 s</a:t>
+              <a:t>sur 10 849 photos jamais vues à l'entraînement</a:t>
             </a:r>
             <a:endParaRPr lang="en-US" sz="1200" dirty="0"/>
           </a:p>
@@ -2730,7 +2730,7 @@
                 <a:ea typeface="Cambria" pitchFamily="34" charset="-122"/>
                 <a:cs typeface="Cambria" pitchFamily="34" charset="-120"/>
               </a:rPr>
-              <a:t>4</a:t>
+              <a:t>38</a:t>
             </a:r>
             <a:endParaRPr lang="en-US" sz="4800" dirty="0"/>
           </a:p>
@@ -2769,7 +2769,7 @@
                 <a:ea typeface="Calibri" pitchFamily="34" charset="-122"/>
                 <a:cs typeface="Calibri" pitchFamily="34" charset="-120"/>
               </a:rPr>
-              <a:t>critères visuels analysés</a:t>
+              <a:t>maladies reconnues</a:t>
             </a:r>
             <a:endParaRPr lang="en-US" sz="1500" dirty="0"/>
           </a:p>
@@ -2808,7 +2808,7 @@
                 <a:ea typeface="Calibri" pitchFamily="34" charset="-122"/>
                 <a:cs typeface="Calibri" pitchFamily="34" charset="-120"/>
               </a:rPr>
-              <a:t>couleur, saturation, contraste, texture</a:t>
+              <a:t>sur 14 cultures différentes</a:t>
             </a:r>
             <a:endParaRPr lang="en-US" sz="1200" dirty="0"/>
           </a:p>
@@ -2874,7 +2874,7 @@
                 <a:ea typeface="Cambria" pitchFamily="34" charset="-122"/>
                 <a:cs typeface="Cambria" pitchFamily="34" charset="-120"/>
               </a:rPr>
-              <a:t>5</a:t>
+              <a:t>30-50 ms</a:t>
             </a:r>
             <a:endParaRPr lang="en-US" sz="4800" dirty="0"/>
           </a:p>
@@ -2913,7 +2913,7 @@
                 <a:ea typeface="Calibri" pitchFamily="34" charset="-122"/>
                 <a:cs typeface="Calibri" pitchFamily="34" charset="-120"/>
               </a:rPr>
-              <a:t>classes reconnues</a:t>
+              <a:t>par diagnostic</a:t>
             </a:r>
             <a:endParaRPr lang="en-US" sz="1500" dirty="0"/>
           </a:p>
@@ -2952,7 +2952,7 @@
                 <a:ea typeface="Calibri" pitchFamily="34" charset="-122"/>
                 <a:cs typeface="Calibri" pitchFamily="34" charset="-120"/>
               </a:rPr>
-              <a:t>4 maladies + état sain</a:t>
+              <a:t>modèle TFLite, 4,9 Mo</a:t>
             </a:r>
             <a:endParaRPr lang="en-US" sz="1200" dirty="0"/>
           </a:p>
@@ -3290,7 +3290,7 @@
                 <a:ea typeface="Calibri" pitchFamily="34" charset="-122"/>
                 <a:cs typeface="Calibri" pitchFamily="34" charset="-120"/>
               </a:rPr>
-              <a:t>Analyse</a:t>
+              <a:t>Prétraitement</a:t>
             </a:r>
             <a:endParaRPr lang="en-US" sz="1400" dirty="0"/>
           </a:p>
@@ -3329,7 +3329,7 @@
                 <a:ea typeface="Calibri" pitchFamily="34" charset="-122"/>
                 <a:cs typeface="Calibri" pitchFamily="34" charset="-120"/>
               </a:rPr>
-              <a:t>OpenCV lit couleur, saturation, contraste et texture</a:t>
+              <a:t>Redimensionnement 224×224, normalisation</a:t>
             </a:r>
             <a:endParaRPr lang="en-US" sz="1150" dirty="0"/>
           </a:p>
@@ -3459,7 +3459,7 @@
                 <a:ea typeface="Calibri" pitchFamily="34" charset="-122"/>
                 <a:cs typeface="Calibri" pitchFamily="34" charset="-120"/>
               </a:rPr>
-              <a:t>Comparaison</a:t>
+              <a:t>Inférence</a:t>
             </a:r>
             <a:endParaRPr lang="en-US" sz="1400" dirty="0"/>
           </a:p>
@@ -3498,7 +3498,7 @@
                 <a:ea typeface="Calibri" pitchFamily="34" charset="-122"/>
                 <a:cs typeface="Calibri" pitchFamily="34" charset="-120"/>
               </a:rPr>
-              <a:t>Confrontation aux signatures connues</a:t>
+              <a:t>MobileNetV2 + tête entraînée (TFLite)</a:t>
             </a:r>
             <a:endParaRPr lang="en-US" sz="1150" dirty="0"/>
           </a:p>
@@ -3667,7 +3667,7 @@
                 <a:ea typeface="Calibri" pitchFamily="34" charset="-122"/>
                 <a:cs typeface="Calibri" pitchFamily="34" charset="-120"/>
               </a:rPr>
-              <a:t>Maladie probable et indice de confiance</a:t>
+              <a:t>Classe la plus probable et indice de confiance</a:t>
             </a:r>
             <a:endParaRPr lang="en-US" sz="1150" dirty="0"/>
           </a:p>
@@ -3706,7 +3706,7 @@
                 <a:ea typeface="Calibri" pitchFamily="34" charset="-122"/>
                 <a:cs typeface="Calibri" pitchFamily="34" charset="-120"/>
               </a:rPr>
-              <a:t>Maladies couvertes  ·  Rouille du blé  ·  Mildiou du raisin  ·  Oïdium  ·  Septoriose</a:t>
+              <a:t>Transfer learning  ·  MobileNetV2 (ImageNet)  ·  Entraîné sur PlantVillage (54 305 photos réelles)</a:t>
             </a:r>
             <a:endParaRPr lang="en-US" sz="1350" dirty="0"/>
           </a:p>
@@ -5998,7 +5998,7 @@
                 <a:ea typeface="Cambria" pitchFamily="34" charset="-122"/>
                 <a:cs typeface="Cambria" pitchFamily="34" charset="-120"/>
               </a:rPr>
-              <a:t>1,5 s</a:t>
+              <a:t>96,70 %</a:t>
             </a:r>
             <a:endParaRPr lang="en-US" sz="4000" dirty="0"/>
           </a:p>
@@ -6037,7 +6037,7 @@
                 <a:ea typeface="Calibri" pitchFamily="34" charset="-122"/>
                 <a:cs typeface="Calibri" pitchFamily="34" charset="-120"/>
               </a:rPr>
-              <a:t>temps de réponse</a:t>
+              <a:t>précision IA mesurée</a:t>
             </a:r>
             <a:endParaRPr lang="en-US" sz="1350" dirty="0"/>
           </a:p>
@@ -6076,7 +6076,7 @@
                 <a:ea typeface="Calibri" pitchFamily="34" charset="-122"/>
                 <a:cs typeface="Calibri" pitchFamily="34" charset="-120"/>
               </a:rPr>
-              <a:t>objectif interne : &lt; 2 s</a:t>
+              <a:t>10 849 photos de test</a:t>
             </a:r>
             <a:endParaRPr lang="en-US" sz="1150" dirty="0"/>
           </a:p>
@@ -7990,7 +7990,281 @@
                           <a:ea typeface="Calibri" pitchFamily="34" charset="-122"/>
                           <a:cs typeface="Calibri" pitchFamily="34" charset="-120"/>
                         </a:rPr>
-                        <a:t>1,5 s</a:t>
+                        <a:t>30-50 ms</a:t>
+                      </a:r>
+                      <a:endParaRPr lang="en-US" sz="1250" dirty="0">
+                        <a:latin typeface="Calibri" charset="0"/>
+                        <a:ea typeface="Calibri" charset="0"/>
+                        <a:cs typeface="Calibri" charset="0"/>
+                      </a:endParaRPr>
+                    </a:p>
+                  </a:txBody>
+                  <a:tcPr marL="91440" marR="91440" marT="45720" marB="45720" anchor="ctr">
+                    <a:lnL w="12700" cap="flat" cmpd="sng" algn="ctr">
+                      <a:solidFill>
+                        <a:srgbClr val="DDE4D8"/>
+                      </a:solidFill>
+                      <a:prstDash val="solid"/>
+                      <a:round/>
+                      <a:headEnd type="none" w="med" len="med"/>
+                      <a:tailEnd type="none" w="med" len="med"/>
+                    </a:lnL>
+                    <a:lnR w="12700" cap="flat" cmpd="sng" algn="ctr">
+                      <a:solidFill>
+                        <a:srgbClr val="DDE4D8"/>
+                      </a:solidFill>
+                      <a:prstDash val="solid"/>
+                      <a:round/>
+                      <a:headEnd type="none" w="med" len="med"/>
+                      <a:tailEnd type="none" w="med" len="med"/>
+                    </a:lnR>
+                    <a:lnT w="12700" cap="flat" cmpd="sng" algn="ctr">
+                      <a:solidFill>
+                        <a:srgbClr val="DDE4D8"/>
+                      </a:solidFill>
+                      <a:prstDash val="solid"/>
+                      <a:round/>
+                      <a:headEnd type="none" w="med" len="med"/>
+                      <a:tailEnd type="none" w="med" len="med"/>
+                    </a:lnT>
+                    <a:lnB w="12700" cap="flat" cmpd="sng" algn="ctr">
+                      <a:solidFill>
+                        <a:srgbClr val="DDE4D8"/>
+                      </a:solidFill>
+                      <a:prstDash val="solid"/>
+                      <a:round/>
+                      <a:headEnd type="none" w="med" len="med"/>
+                      <a:tailEnd type="none" w="med" len="med"/>
+                    </a:lnB>
+                    <a:solidFill>
+                      <a:srgbClr val="FFFFFF"/>
+                    </a:solidFill>
+                  </a:tcPr>
+                </a:tc>
+              </a:tr>
+              <a:tr h="329184">
+                <a:tc>
+                  <a:txBody>
+                    <a:bodyPr/>
+                    <a:lstStyle/>
+                    <a:p>
+                      <a:pPr indent="0" marL="0">
+                        <a:buNone/>
+                      </a:pPr>
+                      <a:r>
+                        <a:rPr lang="en-US" sz="1250" dirty="0">
+                          <a:solidFill>
+                            <a:srgbClr val="2B2B2B"/>
+                          </a:solidFill>
+                          <a:latin typeface="Calibri" pitchFamily="34" charset="0"/>
+                          <a:ea typeface="Calibri" pitchFamily="34" charset="-122"/>
+                          <a:cs typeface="Calibri" pitchFamily="34" charset="-120"/>
+                        </a:rPr>
+                        <a:t>Précision du modèle IA</a:t>
+                      </a:r>
+                      <a:endParaRPr lang="en-US" sz="1250" dirty="0">
+                        <a:latin typeface="Calibri" charset="0"/>
+                        <a:ea typeface="Calibri" charset="0"/>
+                        <a:cs typeface="Calibri" charset="0"/>
+                      </a:endParaRPr>
+                    </a:p>
+                  </a:txBody>
+                  <a:tcPr marL="91440" marR="91440" marT="45720" marB="45720" anchor="ctr">
+                    <a:lnL w="12700" cap="flat" cmpd="sng" algn="ctr">
+                      <a:solidFill>
+                        <a:srgbClr val="DDE4D8"/>
+                      </a:solidFill>
+                      <a:prstDash val="solid"/>
+                      <a:round/>
+                      <a:headEnd type="none" w="med" len="med"/>
+                      <a:tailEnd type="none" w="med" len="med"/>
+                    </a:lnL>
+                    <a:lnR w="12700" cap="flat" cmpd="sng" algn="ctr">
+                      <a:solidFill>
+                        <a:srgbClr val="DDE4D8"/>
+                      </a:solidFill>
+                      <a:prstDash val="solid"/>
+                      <a:round/>
+                      <a:headEnd type="none" w="med" len="med"/>
+                      <a:tailEnd type="none" w="med" len="med"/>
+                    </a:lnR>
+                    <a:lnT w="12700" cap="flat" cmpd="sng" algn="ctr">
+                      <a:solidFill>
+                        <a:srgbClr val="DDE4D8"/>
+                      </a:solidFill>
+                      <a:prstDash val="solid"/>
+                      <a:round/>
+                      <a:headEnd type="none" w="med" len="med"/>
+                      <a:tailEnd type="none" w="med" len="med"/>
+                    </a:lnT>
+                    <a:lnB w="12700" cap="flat" cmpd="sng" algn="ctr">
+                      <a:solidFill>
+                        <a:srgbClr val="DDE4D8"/>
+                      </a:solidFill>
+                      <a:prstDash val="solid"/>
+                      <a:round/>
+                      <a:headEnd type="none" w="med" len="med"/>
+                      <a:tailEnd type="none" w="med" len="med"/>
+                    </a:lnB>
+                    <a:solidFill>
+                      <a:srgbClr val="FFFFFF"/>
+                    </a:solidFill>
+                  </a:tcPr>
+                </a:tc>
+                <a:tc>
+                  <a:txBody>
+                    <a:bodyPr/>
+                    <a:lstStyle/>
+                    <a:p>
+                      <a:pPr indent="0" marL="0">
+                        <a:buNone/>
+                      </a:pPr>
+                      <a:r>
+                        <a:rPr lang="en-US" sz="1250" dirty="0">
+                          <a:solidFill>
+                            <a:srgbClr val="2B2B2B"/>
+                          </a:solidFill>
+                          <a:latin typeface="Calibri" pitchFamily="34" charset="0"/>
+                          <a:ea typeface="Calibri" pitchFamily="34" charset="-122"/>
+                          <a:cs typeface="Calibri" pitchFamily="34" charset="-120"/>
+                        </a:rPr>
+                        <a:t>Mesuré (test)</a:t>
+                      </a:r>
+                      <a:endParaRPr lang="en-US" sz="1250" dirty="0">
+                        <a:latin typeface="Calibri" charset="0"/>
+                        <a:ea typeface="Calibri" charset="0"/>
+                        <a:cs typeface="Calibri" charset="0"/>
+                      </a:endParaRPr>
+                    </a:p>
+                  </a:txBody>
+                  <a:tcPr marL="91440" marR="91440" marT="45720" marB="45720" anchor="ctr">
+                    <a:lnL w="12700" cap="flat" cmpd="sng" algn="ctr">
+                      <a:solidFill>
+                        <a:srgbClr val="DDE4D8"/>
+                      </a:solidFill>
+                      <a:prstDash val="solid"/>
+                      <a:round/>
+                      <a:headEnd type="none" w="med" len="med"/>
+                      <a:tailEnd type="none" w="med" len="med"/>
+                    </a:lnL>
+                    <a:lnR w="12700" cap="flat" cmpd="sng" algn="ctr">
+                      <a:solidFill>
+                        <a:srgbClr val="DDE4D8"/>
+                      </a:solidFill>
+                      <a:prstDash val="solid"/>
+                      <a:round/>
+                      <a:headEnd type="none" w="med" len="med"/>
+                      <a:tailEnd type="none" w="med" len="med"/>
+                    </a:lnR>
+                    <a:lnT w="12700" cap="flat" cmpd="sng" algn="ctr">
+                      <a:solidFill>
+                        <a:srgbClr val="DDE4D8"/>
+                      </a:solidFill>
+                      <a:prstDash val="solid"/>
+                      <a:round/>
+                      <a:headEnd type="none" w="med" len="med"/>
+                      <a:tailEnd type="none" w="med" len="med"/>
+                    </a:lnT>
+                    <a:lnB w="12700" cap="flat" cmpd="sng" algn="ctr">
+                      <a:solidFill>
+                        <a:srgbClr val="DDE4D8"/>
+                      </a:solidFill>
+                      <a:prstDash val="solid"/>
+                      <a:round/>
+                      <a:headEnd type="none" w="med" len="med"/>
+                      <a:tailEnd type="none" w="med" len="med"/>
+                    </a:lnB>
+                    <a:solidFill>
+                      <a:srgbClr val="FFFFFF"/>
+                    </a:solidFill>
+                  </a:tcPr>
+                </a:tc>
+                <a:tc>
+                  <a:txBody>
+                    <a:bodyPr/>
+                    <a:lstStyle/>
+                    <a:p>
+                      <a:pPr indent="0" marL="0">
+                        <a:buNone/>
+                      </a:pPr>
+                      <a:r>
+                        <a:rPr lang="en-US" sz="1250" dirty="0">
+                          <a:solidFill>
+                            <a:srgbClr val="2B2B2B"/>
+                          </a:solidFill>
+                          <a:latin typeface="Calibri" pitchFamily="34" charset="0"/>
+                          <a:ea typeface="Calibri" pitchFamily="34" charset="-122"/>
+                          <a:cs typeface="Calibri" pitchFamily="34" charset="-120"/>
+                        </a:rPr>
+                        <a:t>—</a:t>
+                      </a:r>
+                      <a:endParaRPr lang="en-US" sz="1250" dirty="0">
+                        <a:latin typeface="Calibri" charset="0"/>
+                        <a:ea typeface="Calibri" charset="0"/>
+                        <a:cs typeface="Calibri" charset="0"/>
+                      </a:endParaRPr>
+                    </a:p>
+                  </a:txBody>
+                  <a:tcPr marL="91440" marR="91440" marT="45720" marB="45720" anchor="ctr">
+                    <a:lnL w="12700" cap="flat" cmpd="sng" algn="ctr">
+                      <a:solidFill>
+                        <a:srgbClr val="DDE4D8"/>
+                      </a:solidFill>
+                      <a:prstDash val="solid"/>
+                      <a:round/>
+                      <a:headEnd type="none" w="med" len="med"/>
+                      <a:tailEnd type="none" w="med" len="med"/>
+                    </a:lnL>
+                    <a:lnR w="12700" cap="flat" cmpd="sng" algn="ctr">
+                      <a:solidFill>
+                        <a:srgbClr val="DDE4D8"/>
+                      </a:solidFill>
+                      <a:prstDash val="solid"/>
+                      <a:round/>
+                      <a:headEnd type="none" w="med" len="med"/>
+                      <a:tailEnd type="none" w="med" len="med"/>
+                    </a:lnR>
+                    <a:lnT w="12700" cap="flat" cmpd="sng" algn="ctr">
+                      <a:solidFill>
+                        <a:srgbClr val="DDE4D8"/>
+                      </a:solidFill>
+                      <a:prstDash val="solid"/>
+                      <a:round/>
+                      <a:headEnd type="none" w="med" len="med"/>
+                      <a:tailEnd type="none" w="med" len="med"/>
+                    </a:lnT>
+                    <a:lnB w="12700" cap="flat" cmpd="sng" algn="ctr">
+                      <a:solidFill>
+                        <a:srgbClr val="DDE4D8"/>
+                      </a:solidFill>
+                      <a:prstDash val="solid"/>
+                      <a:round/>
+                      <a:headEnd type="none" w="med" len="med"/>
+                      <a:tailEnd type="none" w="med" len="med"/>
+                    </a:lnB>
+                    <a:solidFill>
+                      <a:srgbClr val="FFFFFF"/>
+                    </a:solidFill>
+                  </a:tcPr>
+                </a:tc>
+                <a:tc>
+                  <a:txBody>
+                    <a:bodyPr/>
+                    <a:lstStyle/>
+                    <a:p>
+                      <a:pPr indent="0" marL="0">
+                        <a:buNone/>
+                      </a:pPr>
+                      <a:r>
+                        <a:rPr lang="en-US" sz="1250" dirty="0">
+                          <a:solidFill>
+                            <a:srgbClr val="2B2B2B"/>
+                          </a:solidFill>
+                          <a:latin typeface="Calibri" pitchFamily="34" charset="0"/>
+                          <a:ea typeface="Calibri" pitchFamily="34" charset="-122"/>
+                          <a:cs typeface="Calibri" pitchFamily="34" charset="-120"/>
+                        </a:rPr>
+                        <a:t>96,70 %</a:t>
                       </a:r>
                       <a:endParaRPr lang="en-US" sz="1250" dirty="0">
                         <a:latin typeface="Calibri" charset="0"/>
@@ -8351,7 +8625,7 @@
                 <a:ea typeface="Calibri" pitchFamily="34" charset="-122"/>
                 <a:cs typeface="Calibri" pitchFamily="34" charset="-120"/>
               </a:rPr>
-              <a:t>Analyse d'image OpenCV, classification multi-classe, calcul d'indice de confiance</a:t>
+              <a:t>Transfer learning (TensorFlow/MobileNetV2), entraînement, validation à 96,70 %</a:t>
             </a:r>
             <a:endParaRPr lang="en-US" sz="1250" dirty="0"/>
           </a:p>
@@ -14927,7 +15201,7 @@
                 <a:ea typeface="Calibri" pitchFamily="34" charset="-122"/>
                 <a:cs typeface="Calibri" pitchFamily="34" charset="-120"/>
               </a:rPr>
-              <a:t>OpenCV et NumPy</a:t>
+              <a:t>Modèle IA (TFLite)</a:t>
             </a:r>
             <a:endParaRPr lang="en-US" sz="1100" dirty="0"/>
           </a:p>
@@ -15074,7 +15348,7 @@
                 <a:ea typeface="Calibri" pitchFamily="34" charset="-122"/>
                 <a:cs typeface="Calibri" pitchFamily="34" charset="-120"/>
               </a:rPr>
-              <a:t>Photo  →  API FastAPI  →  Analyse OpenCV  →  Écriture PostgreSQL  →  Réponse JSON  →  Interface</a:t>
+              <a:t>Photo  →  API FastAPI  →  Modèle IA (TFLite)  →  Écriture PostgreSQL  →  Réponse JSON  →  Interface</a:t>
             </a:r>
             <a:endParaRPr lang="en-US" sz="1500" dirty="0"/>
           </a:p>

--- a/SOUTENANCE.pptx
+++ b/SOUTENANCE.pptx
@@ -1045,7 +1045,7 @@
           <a:p>
             <a:r>
               <a:rPr lang="en-US" dirty="0"/>
-              <a:t>En conclusion, PlantDiag est une solution prete pour la production, conforme a cent pour cent au cahier des charges, documentee et evolutive. C'est plus qu'un exercice scolaire, c'est un produit reel utilisable des aujourd'hui.</a:t>
+              <a:t>En conclusion, PlantDiag est une solution prete pour la production, conforme a cent pour cent au cahier des charges, documentee et evolutive. Mais je voulais surtout le tester en dehors de l'ecole. Mon frere est agriculteur, il l'a teste directement dans sa ferme. Et mon pere, qui est commercial dans le secteur agricole, m'a emmene sur le terrain pour le faire essayer a plusieurs autres agriculteurs. Le retour qui revenait le plus souvent, ce n'est pas le diagnostic en lui-meme : c'est d'avoir toutes leurs donnees centralisees au meme endroit, et surtout la meteo couplee aux risques de maladie, pour pouvoir anticiper avant que le probleme n'apparaisse plutot que de le decouvrir trop tard.</a:t>
             </a:r>
             <a:endParaRPr lang="en-US" dirty="0"/>
           </a:p>
@@ -9425,12 +9425,12 @@
         </p:nvSpPr>
         <p:spPr>
           <a:xfrm>
-            <a:off x="548640" y="1645920"/>
-            <a:ext cx="5440680" cy="1463040"/>
+            <a:off x="548640" y="1572768"/>
+            <a:ext cx="5440680" cy="1207008"/>
           </a:xfrm>
           <a:prstGeom prst="roundRect">
             <a:avLst>
-              <a:gd name="adj" fmla="val 3750"/>
+              <a:gd name="adj" fmla="val 4545"/>
             </a:avLst>
           </a:prstGeom>
           <a:solidFill>
@@ -9452,24 +9452,24 @@
         </p:nvSpPr>
         <p:spPr>
           <a:xfrm>
-            <a:off x="868680" y="1901952"/>
-            <a:ext cx="4800600" cy="347472"/>
-          </a:xfrm>
-          <a:prstGeom prst="rect">
-            <a:avLst/>
-          </a:prstGeom>
-          <a:noFill/>
-          <a:ln/>
-        </p:spPr>
-        <p:txBody>
-          <a:bodyPr wrap="square" lIns="0" tIns="0" rIns="0" bIns="0" rtlCol="0" anchor="ctr"/>
-          <a:lstStyle/>
-          <a:p>
-            <a:pPr indent="0" marL="0">
-              <a:buNone/>
-            </a:pPr>
-            <a:r>
-              <a:rPr lang="en-US" sz="2000" b="1" dirty="0">
+            <a:off x="868680" y="1755648"/>
+            <a:ext cx="4800600" cy="329184"/>
+          </a:xfrm>
+          <a:prstGeom prst="rect">
+            <a:avLst/>
+          </a:prstGeom>
+          <a:noFill/>
+          <a:ln/>
+        </p:spPr>
+        <p:txBody>
+          <a:bodyPr wrap="square" lIns="0" tIns="0" rIns="0" bIns="0" rtlCol="0" anchor="ctr"/>
+          <a:lstStyle/>
+          <a:p>
+            <a:pPr indent="0" marL="0">
+              <a:buNone/>
+            </a:pPr>
+            <a:r>
+              <a:rPr lang="en-US" sz="1800" b="1" dirty="0">
                 <a:solidFill>
                   <a:srgbClr val="97BC62"/>
                 </a:solidFill>
@@ -9479,7 +9479,7 @@
               </a:rPr>
               <a:t>Fonctionnel</a:t>
             </a:r>
-            <a:endParaRPr lang="en-US" sz="2000" dirty="0"/>
+            <a:endParaRPr lang="en-US" sz="1800" dirty="0"/>
           </a:p>
         </p:txBody>
       </p:sp>
@@ -9491,24 +9491,24 @@
         </p:nvSpPr>
         <p:spPr>
           <a:xfrm>
-            <a:off x="868680" y="2331720"/>
-            <a:ext cx="4800600" cy="594360"/>
-          </a:xfrm>
-          <a:prstGeom prst="rect">
-            <a:avLst/>
-          </a:prstGeom>
-          <a:noFill/>
-          <a:ln/>
-        </p:spPr>
-        <p:txBody>
-          <a:bodyPr wrap="square" lIns="0" tIns="0" rIns="0" bIns="0" rtlCol="0" anchor="ctr"/>
-          <a:lstStyle/>
-          <a:p>
-            <a:pPr indent="0" marL="0">
-              <a:buNone/>
-            </a:pPr>
-            <a:r>
-              <a:rPr lang="en-US" sz="1300" dirty="0">
+            <a:off x="868680" y="2139696"/>
+            <a:ext cx="4800600" cy="548640"/>
+          </a:xfrm>
+          <a:prstGeom prst="rect">
+            <a:avLst/>
+          </a:prstGeom>
+          <a:noFill/>
+          <a:ln/>
+        </p:spPr>
+        <p:txBody>
+          <a:bodyPr wrap="square" lIns="0" tIns="0" rIns="0" bIns="0" rtlCol="0" anchor="ctr"/>
+          <a:lstStyle/>
+          <a:p>
+            <a:pPr indent="0" marL="0">
+              <a:buNone/>
+            </a:pPr>
+            <a:r>
+              <a:rPr lang="en-US" sz="1200" dirty="0">
                 <a:solidFill>
                   <a:srgbClr val="D8E8CF"/>
                 </a:solidFill>
@@ -9518,7 +9518,7 @@
               </a:rPr>
               <a:t>L'application tourne en production et reste accessible en continu.</a:t>
             </a:r>
-            <a:endParaRPr lang="en-US" sz="1300" dirty="0"/>
+            <a:endParaRPr lang="en-US" sz="1200" dirty="0"/>
           </a:p>
         </p:txBody>
       </p:sp>
@@ -9530,12 +9530,12 @@
         </p:nvSpPr>
         <p:spPr>
           <a:xfrm>
-            <a:off x="6172200" y="1645920"/>
-            <a:ext cx="5440680" cy="1463040"/>
+            <a:off x="6172200" y="1572768"/>
+            <a:ext cx="5440680" cy="1207008"/>
           </a:xfrm>
           <a:prstGeom prst="roundRect">
             <a:avLst>
-              <a:gd name="adj" fmla="val 3750"/>
+              <a:gd name="adj" fmla="val 4545"/>
             </a:avLst>
           </a:prstGeom>
           <a:solidFill>
@@ -9557,24 +9557,24 @@
         </p:nvSpPr>
         <p:spPr>
           <a:xfrm>
-            <a:off x="6492240" y="1901952"/>
-            <a:ext cx="4800600" cy="347472"/>
-          </a:xfrm>
-          <a:prstGeom prst="rect">
-            <a:avLst/>
-          </a:prstGeom>
-          <a:noFill/>
-          <a:ln/>
-        </p:spPr>
-        <p:txBody>
-          <a:bodyPr wrap="square" lIns="0" tIns="0" rIns="0" bIns="0" rtlCol="0" anchor="ctr"/>
-          <a:lstStyle/>
-          <a:p>
-            <a:pPr indent="0" marL="0">
-              <a:buNone/>
-            </a:pPr>
-            <a:r>
-              <a:rPr lang="en-US" sz="2000" b="1" dirty="0">
+            <a:off x="6492240" y="1755648"/>
+            <a:ext cx="4800600" cy="329184"/>
+          </a:xfrm>
+          <a:prstGeom prst="rect">
+            <a:avLst/>
+          </a:prstGeom>
+          <a:noFill/>
+          <a:ln/>
+        </p:spPr>
+        <p:txBody>
+          <a:bodyPr wrap="square" lIns="0" tIns="0" rIns="0" bIns="0" rtlCol="0" anchor="ctr"/>
+          <a:lstStyle/>
+          <a:p>
+            <a:pPr indent="0" marL="0">
+              <a:buNone/>
+            </a:pPr>
+            <a:r>
+              <a:rPr lang="en-US" sz="1800" b="1" dirty="0">
                 <a:solidFill>
                   <a:srgbClr val="97BC62"/>
                 </a:solidFill>
@@ -9584,7 +9584,7 @@
               </a:rPr>
               <a:t>Conforme</a:t>
             </a:r>
-            <a:endParaRPr lang="en-US" sz="2000" dirty="0"/>
+            <a:endParaRPr lang="en-US" sz="1800" dirty="0"/>
           </a:p>
         </p:txBody>
       </p:sp>
@@ -9596,24 +9596,24 @@
         </p:nvSpPr>
         <p:spPr>
           <a:xfrm>
-            <a:off x="6492240" y="2331720"/>
-            <a:ext cx="4800600" cy="594360"/>
-          </a:xfrm>
-          <a:prstGeom prst="rect">
-            <a:avLst/>
-          </a:prstGeom>
-          <a:noFill/>
-          <a:ln/>
-        </p:spPr>
-        <p:txBody>
-          <a:bodyPr wrap="square" lIns="0" tIns="0" rIns="0" bIns="0" rtlCol="0" anchor="ctr"/>
-          <a:lstStyle/>
-          <a:p>
-            <a:pPr indent="0" marL="0">
-              <a:buNone/>
-            </a:pPr>
-            <a:r>
-              <a:rPr lang="en-US" sz="1300" dirty="0">
+            <a:off x="6492240" y="2139696"/>
+            <a:ext cx="4800600" cy="548640"/>
+          </a:xfrm>
+          <a:prstGeom prst="rect">
+            <a:avLst/>
+          </a:prstGeom>
+          <a:noFill/>
+          <a:ln/>
+        </p:spPr>
+        <p:txBody>
+          <a:bodyPr wrap="square" lIns="0" tIns="0" rIns="0" bIns="0" rtlCol="0" anchor="ctr"/>
+          <a:lstStyle/>
+          <a:p>
+            <a:pPr indent="0" marL="0">
+              <a:buNone/>
+            </a:pPr>
+            <a:r>
+              <a:rPr lang="en-US" sz="1200" dirty="0">
                 <a:solidFill>
                   <a:srgbClr val="D8E8CF"/>
                 </a:solidFill>
@@ -9623,7 +9623,7 @@
               </a:rPr>
               <a:t>Tous les objectifs du cahier des charges sont couverts et vérifiables.</a:t>
             </a:r>
-            <a:endParaRPr lang="en-US" sz="1300" dirty="0"/>
+            <a:endParaRPr lang="en-US" sz="1200" dirty="0"/>
           </a:p>
         </p:txBody>
       </p:sp>
@@ -9635,12 +9635,12 @@
         </p:nvSpPr>
         <p:spPr>
           <a:xfrm>
-            <a:off x="548640" y="3337560"/>
-            <a:ext cx="5440680" cy="1463040"/>
+            <a:off x="548640" y="2990088"/>
+            <a:ext cx="5440680" cy="1207008"/>
           </a:xfrm>
           <a:prstGeom prst="roundRect">
             <a:avLst>
-              <a:gd name="adj" fmla="val 3750"/>
+              <a:gd name="adj" fmla="val 4545"/>
             </a:avLst>
           </a:prstGeom>
           <a:solidFill>
@@ -9662,24 +9662,24 @@
         </p:nvSpPr>
         <p:spPr>
           <a:xfrm>
-            <a:off x="868680" y="3593592"/>
-            <a:ext cx="4800600" cy="347472"/>
-          </a:xfrm>
-          <a:prstGeom prst="rect">
-            <a:avLst/>
-          </a:prstGeom>
-          <a:noFill/>
-          <a:ln/>
-        </p:spPr>
-        <p:txBody>
-          <a:bodyPr wrap="square" lIns="0" tIns="0" rIns="0" bIns="0" rtlCol="0" anchor="ctr"/>
-          <a:lstStyle/>
-          <a:p>
-            <a:pPr indent="0" marL="0">
-              <a:buNone/>
-            </a:pPr>
-            <a:r>
-              <a:rPr lang="en-US" sz="2000" b="1" dirty="0">
+            <a:off x="868680" y="3172968"/>
+            <a:ext cx="4800600" cy="329184"/>
+          </a:xfrm>
+          <a:prstGeom prst="rect">
+            <a:avLst/>
+          </a:prstGeom>
+          <a:noFill/>
+          <a:ln/>
+        </p:spPr>
+        <p:txBody>
+          <a:bodyPr wrap="square" lIns="0" tIns="0" rIns="0" bIns="0" rtlCol="0" anchor="ctr"/>
+          <a:lstStyle/>
+          <a:p>
+            <a:pPr indent="0" marL="0">
+              <a:buNone/>
+            </a:pPr>
+            <a:r>
+              <a:rPr lang="en-US" sz="1800" b="1" dirty="0">
                 <a:solidFill>
                   <a:srgbClr val="97BC62"/>
                 </a:solidFill>
@@ -9689,7 +9689,7 @@
               </a:rPr>
               <a:t>Documenté</a:t>
             </a:r>
-            <a:endParaRPr lang="en-US" sz="2000" dirty="0"/>
+            <a:endParaRPr lang="en-US" sz="1800" dirty="0"/>
           </a:p>
         </p:txBody>
       </p:sp>
@@ -9701,24 +9701,24 @@
         </p:nvSpPr>
         <p:spPr>
           <a:xfrm>
-            <a:off x="868680" y="4023360"/>
-            <a:ext cx="4800600" cy="594360"/>
-          </a:xfrm>
-          <a:prstGeom prst="rect">
-            <a:avLst/>
-          </a:prstGeom>
-          <a:noFill/>
-          <a:ln/>
-        </p:spPr>
-        <p:txBody>
-          <a:bodyPr wrap="square" lIns="0" tIns="0" rIns="0" bIns="0" rtlCol="0" anchor="ctr"/>
-          <a:lstStyle/>
-          <a:p>
-            <a:pPr indent="0" marL="0">
-              <a:buNone/>
-            </a:pPr>
-            <a:r>
-              <a:rPr lang="en-US" sz="1300" dirty="0">
+            <a:off x="868680" y="3557016"/>
+            <a:ext cx="4800600" cy="548640"/>
+          </a:xfrm>
+          <a:prstGeom prst="rect">
+            <a:avLst/>
+          </a:prstGeom>
+          <a:noFill/>
+          <a:ln/>
+        </p:spPr>
+        <p:txBody>
+          <a:bodyPr wrap="square" lIns="0" tIns="0" rIns="0" bIns="0" rtlCol="0" anchor="ctr"/>
+          <a:lstStyle/>
+          <a:p>
+            <a:pPr indent="0" marL="0">
+              <a:buNone/>
+            </a:pPr>
+            <a:r>
+              <a:rPr lang="en-US" sz="1200" dirty="0">
                 <a:solidFill>
                   <a:srgbClr val="D8E8CF"/>
                 </a:solidFill>
@@ -9728,7 +9728,7 @@
               </a:rPr>
               <a:t>Architecture réseau, justifications techniques et guide de déploiement rédigés.</a:t>
             </a:r>
-            <a:endParaRPr lang="en-US" sz="1300" dirty="0"/>
+            <a:endParaRPr lang="en-US" sz="1200" dirty="0"/>
           </a:p>
         </p:txBody>
       </p:sp>
@@ -9740,12 +9740,12 @@
         </p:nvSpPr>
         <p:spPr>
           <a:xfrm>
-            <a:off x="6172200" y="3337560"/>
-            <a:ext cx="5440680" cy="1463040"/>
+            <a:off x="6172200" y="2990088"/>
+            <a:ext cx="5440680" cy="1207008"/>
           </a:xfrm>
           <a:prstGeom prst="roundRect">
             <a:avLst>
-              <a:gd name="adj" fmla="val 3750"/>
+              <a:gd name="adj" fmla="val 4545"/>
             </a:avLst>
           </a:prstGeom>
           <a:solidFill>
@@ -9767,24 +9767,24 @@
         </p:nvSpPr>
         <p:spPr>
           <a:xfrm>
-            <a:off x="6492240" y="3593592"/>
-            <a:ext cx="4800600" cy="347472"/>
-          </a:xfrm>
-          <a:prstGeom prst="rect">
-            <a:avLst/>
-          </a:prstGeom>
-          <a:noFill/>
-          <a:ln/>
-        </p:spPr>
-        <p:txBody>
-          <a:bodyPr wrap="square" lIns="0" tIns="0" rIns="0" bIns="0" rtlCol="0" anchor="ctr"/>
-          <a:lstStyle/>
-          <a:p>
-            <a:pPr indent="0" marL="0">
-              <a:buNone/>
-            </a:pPr>
-            <a:r>
-              <a:rPr lang="en-US" sz="2000" b="1" dirty="0">
+            <a:off x="6492240" y="3172968"/>
+            <a:ext cx="4800600" cy="329184"/>
+          </a:xfrm>
+          <a:prstGeom prst="rect">
+            <a:avLst/>
+          </a:prstGeom>
+          <a:noFill/>
+          <a:ln/>
+        </p:spPr>
+        <p:txBody>
+          <a:bodyPr wrap="square" lIns="0" tIns="0" rIns="0" bIns="0" rtlCol="0" anchor="ctr"/>
+          <a:lstStyle/>
+          <a:p>
+            <a:pPr indent="0" marL="0">
+              <a:buNone/>
+            </a:pPr>
+            <a:r>
+              <a:rPr lang="en-US" sz="1800" b="1" dirty="0">
                 <a:solidFill>
                   <a:srgbClr val="97BC62"/>
                 </a:solidFill>
@@ -9794,7 +9794,7 @@
               </a:rPr>
               <a:t>Évolutif</a:t>
             </a:r>
-            <a:endParaRPr lang="en-US" sz="2000" dirty="0"/>
+            <a:endParaRPr lang="en-US" sz="1800" dirty="0"/>
           </a:p>
         </p:txBody>
       </p:sp>
@@ -9806,24 +9806,24 @@
         </p:nvSpPr>
         <p:spPr>
           <a:xfrm>
-            <a:off x="6492240" y="4023360"/>
-            <a:ext cx="4800600" cy="594360"/>
-          </a:xfrm>
-          <a:prstGeom prst="rect">
-            <a:avLst/>
-          </a:prstGeom>
-          <a:noFill/>
-          <a:ln/>
-        </p:spPr>
-        <p:txBody>
-          <a:bodyPr wrap="square" lIns="0" tIns="0" rIns="0" bIns="0" rtlCol="0" anchor="ctr"/>
-          <a:lstStyle/>
-          <a:p>
-            <a:pPr indent="0" marL="0">
-              <a:buNone/>
-            </a:pPr>
-            <a:r>
-              <a:rPr lang="en-US" sz="1300" dirty="0">
+            <a:off x="6492240" y="3557016"/>
+            <a:ext cx="4800600" cy="548640"/>
+          </a:xfrm>
+          <a:prstGeom prst="rect">
+            <a:avLst/>
+          </a:prstGeom>
+          <a:noFill/>
+          <a:ln/>
+        </p:spPr>
+        <p:txBody>
+          <a:bodyPr wrap="square" lIns="0" tIns="0" rIns="0" bIns="0" rtlCol="0" anchor="ctr"/>
+          <a:lstStyle/>
+          <a:p>
+            <a:pPr indent="0" marL="0">
+              <a:buNone/>
+            </a:pPr>
+            <a:r>
+              <a:rPr lang="en-US" sz="1200" dirty="0">
                 <a:solidFill>
                   <a:srgbClr val="D8E8CF"/>
                 </a:solidFill>
@@ -9833,46 +9833,151 @@
               </a:rPr>
               <a:t>L'architecture supporte la montée en charge sans réécriture.</a:t>
             </a:r>
-            <a:endParaRPr lang="en-US" sz="1300" dirty="0"/>
-          </a:p>
-        </p:txBody>
-      </p:sp>
-      <p:sp>
-        <p:nvSpPr>
-          <p:cNvPr id="16" name="Text 14"/>
-          <p:cNvSpPr txBox="1"/>
-          <p:nvPr/>
-        </p:nvSpPr>
-        <p:spPr>
-          <a:xfrm>
-            <a:off x="548640" y="5257800"/>
-            <a:ext cx="11064240" cy="457200"/>
-          </a:xfrm>
-          <a:prstGeom prst="rect">
-            <a:avLst/>
-          </a:prstGeom>
-          <a:noFill/>
-          <a:ln/>
-        </p:spPr>
-        <p:txBody>
-          <a:bodyPr wrap="square" lIns="0" tIns="0" rIns="0" bIns="0" rtlCol="0" anchor="ctr"/>
-          <a:lstStyle/>
-          <a:p>
-            <a:pPr indent="0" marL="0">
-              <a:buNone/>
-            </a:pPr>
-            <a:r>
-              <a:rPr lang="en-US" sz="1800" b="1" i="1" dirty="0">
+            <a:endParaRPr lang="en-US" sz="1200" dirty="0"/>
+          </a:p>
+        </p:txBody>
+      </p:sp>
+      <p:sp>
+        <p:nvSpPr>
+          <p:cNvPr id="16" name="Shape 14"/>
+          <p:cNvSpPr/>
+          <p:nvPr/>
+        </p:nvSpPr>
+        <p:spPr>
+          <a:xfrm>
+            <a:off x="548640" y="4572000"/>
+            <a:ext cx="11064240" cy="1691640"/>
+          </a:xfrm>
+          <a:prstGeom prst="roundRect">
+            <a:avLst>
+              <a:gd name="adj" fmla="val 3243"/>
+            </a:avLst>
+          </a:prstGeom>
+          <a:solidFill>
+            <a:srgbClr val="2C5F2D"/>
+          </a:solidFill>
+          <a:ln w="12700">
+            <a:solidFill>
+              <a:srgbClr val="2C5F2D"/>
+            </a:solidFill>
+            <a:prstDash val="solid"/>
+          </a:ln>
+        </p:spPr>
+      </p:sp>
+      <p:sp>
+        <p:nvSpPr>
+          <p:cNvPr id="17" name="Text 15"/>
+          <p:cNvSpPr txBox="1"/>
+          <p:nvPr/>
+        </p:nvSpPr>
+        <p:spPr>
+          <a:xfrm>
+            <a:off x="868680" y="4736592"/>
+            <a:ext cx="10424160" cy="256032"/>
+          </a:xfrm>
+          <a:prstGeom prst="rect">
+            <a:avLst/>
+          </a:prstGeom>
+          <a:noFill/>
+          <a:ln/>
+        </p:spPr>
+        <p:txBody>
+          <a:bodyPr wrap="square" lIns="0" tIns="0" rIns="0" bIns="0" rtlCol="0" anchor="ctr"/>
+          <a:lstStyle/>
+          <a:p>
+            <a:pPr indent="0" marL="0">
+              <a:buNone/>
+            </a:pPr>
+            <a:r>
+              <a:rPr lang="en-US" sz="1100" b="1" spc="120" kern="0" dirty="0">
+                <a:solidFill>
+                  <a:srgbClr val="97BC62"/>
+                </a:solidFill>
+                <a:latin typeface="Calibri" pitchFamily="34" charset="0"/>
+                <a:ea typeface="Calibri" pitchFamily="34" charset="-122"/>
+                <a:cs typeface="Calibri" pitchFamily="34" charset="-120"/>
+              </a:rPr>
+              <a:t>VALIDÉ SUR LE TERRAIN, PAS SEULEMENT À L'ÉCOLE</a:t>
+            </a:r>
+            <a:endParaRPr lang="en-US" sz="1100" dirty="0"/>
+          </a:p>
+        </p:txBody>
+      </p:sp>
+      <p:sp>
+        <p:nvSpPr>
+          <p:cNvPr id="18" name="Text 16"/>
+          <p:cNvSpPr txBox="1"/>
+          <p:nvPr/>
+        </p:nvSpPr>
+        <p:spPr>
+          <a:xfrm>
+            <a:off x="868680" y="5029200"/>
+            <a:ext cx="10424160" cy="548640"/>
+          </a:xfrm>
+          <a:prstGeom prst="rect">
+            <a:avLst/>
+          </a:prstGeom>
+          <a:noFill/>
+          <a:ln/>
+        </p:spPr>
+        <p:txBody>
+          <a:bodyPr wrap="square" lIns="0" tIns="0" rIns="0" bIns="0" rtlCol="0" anchor="ctr"/>
+          <a:lstStyle/>
+          <a:p>
+            <a:pPr indent="0" marL="0">
+              <a:buNone/>
+            </a:pPr>
+            <a:r>
+              <a:rPr lang="en-US" sz="1350" dirty="0">
                 <a:solidFill>
                   <a:srgbClr val="FFFFFF"/>
                 </a:solidFill>
-                <a:latin typeface="Cambria" pitchFamily="34" charset="0"/>
-                <a:ea typeface="Cambria" pitchFamily="34" charset="-122"/>
-                <a:cs typeface="Cambria" pitchFamily="34" charset="-120"/>
-              </a:rPr>
-              <a:t>PlantDiag est immédiatement utilisable par un agriculteur, depuis son téléphone, dans son champ.</a:t>
-            </a:r>
-            <a:endParaRPr lang="en-US" sz="1800" dirty="0"/>
+                <a:latin typeface="Calibri" pitchFamily="34" charset="0"/>
+                <a:ea typeface="Calibri" pitchFamily="34" charset="-122"/>
+                <a:cs typeface="Calibri" pitchFamily="34" charset="-120"/>
+              </a:rPr>
+              <a:t>Testé par mon frère, agriculteur, directement dans sa ferme. Puis testé avec mon père, commercial dans le secteur agricole, auprès de plusieurs autres agriculteurs sur le terrain.</a:t>
+            </a:r>
+            <a:endParaRPr lang="en-US" sz="1350" dirty="0"/>
+          </a:p>
+        </p:txBody>
+      </p:sp>
+      <p:sp>
+        <p:nvSpPr>
+          <p:cNvPr id="19" name="Text 17"/>
+          <p:cNvSpPr txBox="1"/>
+          <p:nvPr/>
+        </p:nvSpPr>
+        <p:spPr>
+          <a:xfrm>
+            <a:off x="868680" y="5532120"/>
+            <a:ext cx="10424160" cy="548640"/>
+          </a:xfrm>
+          <a:prstGeom prst="rect">
+            <a:avLst/>
+          </a:prstGeom>
+          <a:noFill/>
+          <a:ln/>
+        </p:spPr>
+        <p:txBody>
+          <a:bodyPr wrap="square" lIns="0" tIns="0" rIns="0" bIns="0" rtlCol="0" anchor="ctr"/>
+          <a:lstStyle/>
+          <a:p>
+            <a:pPr indent="0" marL="0">
+              <a:buNone/>
+            </a:pPr>
+            <a:r>
+              <a:rPr lang="en-US" sz="1350" b="1" i="1" dirty="0">
+                <a:solidFill>
+                  <a:srgbClr val="D8E8CF"/>
+                </a:solidFill>
+                <a:latin typeface="Calibri" pitchFamily="34" charset="0"/>
+                <a:ea typeface="Calibri" pitchFamily="34" charset="-122"/>
+                <a:cs typeface="Calibri" pitchFamily="34" charset="-120"/>
+              </a:rPr>
+              <a:t>Le retour le plus fréquent : centraliser toutes leurs données au même endroit, et surtout croiser la météo avec le risque de maladie pour anticiper plutôt que subir.</a:t>
+            </a:r>
+            <a:endParaRPr lang="en-US" sz="1350" dirty="0"/>
           </a:p>
         </p:txBody>
       </p:sp>
